--- a/public/fun/pack/pptx/birthday/돌잔치_43_사진중심_설날세배.pptx
+++ b/public/fun/pack/pptx/birthday/돌잔치_43_사진중심_설날세배.pptx
@@ -3286,14 +3286,6 @@
 <file path=ppt/slides/slide1.xml><?xml version="1.0" encoding="utf-8"?>
 <p:sld xmlns:a="http://schemas.openxmlformats.org/drawingml/2006/main" xmlns:p="http://schemas.openxmlformats.org/presentationml/2006/main" xmlns:r="http://schemas.openxmlformats.org/officeDocument/2006/relationships">
   <p:cSld>
-    <p:bg>
-      <p:bgPr>
-        <a:solidFill>
-          <a:srgbClr val="FFFFFF"/>
-        </a:solidFill>
-        <a:effectLst/>
-      </p:bgPr>
-    </p:bg>
     <p:spTree>
       <p:nvGrpSpPr>
         <p:cNvPr id="1" name=""/>
@@ -3301,325 +3293,30 @@
         <p:nvPr/>
       </p:nvGrpSpPr>
       <p:grpSpPr/>
-      <p:sp>
-        <p:nvSpPr>
-          <p:cNvPr id="3" name="장식"/>
-          <p:cNvSpPr/>
+      <p:pic>
+        <p:nvPicPr>
+          <p:cNvPr id="3" name="표지 그림" descr="birthday-43.jpg"/>
+          <p:cNvPicPr>
+            <a:picLocks noChangeAspect="1"/>
+          </p:cNvPicPr>
           <p:nvPr/>
-        </p:nvSpPr>
-        <p:spPr>
-          <a:xfrm>
-            <a:off x="-274320" y="4251960"/>
-            <a:ext cx="12740335" cy="2743200"/>
-          </a:xfrm>
-          <a:prstGeom prst="wave">
-            <a:avLst/>
-          </a:prstGeom>
-          <a:solidFill>
-            <a:srgbClr val="F0D1D6"/>
-          </a:solidFill>
-          <a:ln>
-            <a:noFill/>
-          </a:ln>
-        </p:spPr>
-        <p:txBody>
-          <a:bodyPr rtlCol="0" anchor="ctr"/>
-          <a:lstStyle/>
-          <a:p>
-            <a:pPr algn="ctr"/>
-          </a:p>
-        </p:txBody>
-      </p:sp>
-      <p:sp>
-        <p:nvSpPr>
-          <p:cNvPr id="4" name="장식"/>
-          <p:cNvSpPr/>
-          <p:nvPr/>
-        </p:nvSpPr>
-        <p:spPr>
-          <a:xfrm>
-            <a:off x="-274320" y="5074920"/>
-            <a:ext cx="12740335" cy="2331720"/>
-          </a:xfrm>
-          <a:prstGeom prst="wave">
-            <a:avLst/>
-          </a:prstGeom>
-          <a:solidFill>
-            <a:srgbClr val="8D3443"/>
-          </a:solidFill>
-          <a:ln>
-            <a:noFill/>
-          </a:ln>
-        </p:spPr>
-        <p:txBody>
-          <a:bodyPr rtlCol="0" anchor="ctr"/>
-          <a:lstStyle/>
-          <a:p>
-            <a:pPr algn="ctr"/>
-          </a:p>
-        </p:txBody>
-      </p:sp>
-      <p:sp>
-        <p:nvSpPr>
-          <p:cNvPr id="5" name="장식"/>
-          <p:cNvSpPr/>
-          <p:nvPr/>
-        </p:nvSpPr>
-        <p:spPr>
-          <a:xfrm>
-            <a:off x="8543294" y="1234440"/>
-            <a:ext cx="822959" cy="1371600"/>
-          </a:xfrm>
-          <a:prstGeom prst="roundRect">
-            <a:avLst/>
-          </a:prstGeom>
-          <a:solidFill>
-            <a:srgbClr val="8D3443"/>
-          </a:solidFill>
-          <a:ln>
-            <a:noFill/>
-          </a:ln>
-        </p:spPr>
-        <p:txBody>
-          <a:bodyPr rtlCol="0" anchor="ctr"/>
-          <a:lstStyle/>
-          <a:p>
-            <a:pPr algn="ctr"/>
-          </a:p>
-        </p:txBody>
-      </p:sp>
-      <p:sp>
-        <p:nvSpPr>
-          <p:cNvPr id="6" name="장식"/>
-          <p:cNvSpPr/>
-          <p:nvPr/>
-        </p:nvSpPr>
-        <p:spPr>
-          <a:xfrm>
-            <a:off x="8749034" y="1097280"/>
-            <a:ext cx="411479" cy="137160"/>
+        </p:nvPicPr>
+        <p:blipFill>
+          <a:blip r:embed="rId2"/>
+          <a:stretch>
+            <a:fillRect/>
+          </a:stretch>
+        </p:blipFill>
+        <p:spPr>
+          <a:xfrm>
+            <a:off x="0" y="0"/>
+            <a:ext cx="12191695" cy="6858000"/>
           </a:xfrm>
           <a:prstGeom prst="rect">
             <a:avLst/>
           </a:prstGeom>
-          <a:solidFill>
-            <a:srgbClr val="3B9158"/>
-          </a:solidFill>
-          <a:ln>
-            <a:noFill/>
-          </a:ln>
-        </p:spPr>
-        <p:txBody>
-          <a:bodyPr rtlCol="0" anchor="ctr"/>
-          <a:lstStyle/>
-          <a:p>
-            <a:pPr algn="ctr"/>
-          </a:p>
-        </p:txBody>
-      </p:sp>
-      <p:sp>
-        <p:nvSpPr>
-          <p:cNvPr id="7" name="장식"/>
-          <p:cNvSpPr/>
-          <p:nvPr/>
-        </p:nvSpPr>
-        <p:spPr>
-          <a:xfrm>
-            <a:off x="8749034" y="2606040"/>
-            <a:ext cx="411479" cy="137160"/>
-          </a:xfrm>
-          <a:prstGeom prst="rect">
-            <a:avLst/>
-          </a:prstGeom>
-          <a:solidFill>
-            <a:srgbClr val="3B9158"/>
-          </a:solidFill>
-          <a:ln>
-            <a:noFill/>
-          </a:ln>
-        </p:spPr>
-        <p:txBody>
-          <a:bodyPr rtlCol="0" anchor="ctr"/>
-          <a:lstStyle/>
-          <a:p>
-            <a:pPr algn="ctr"/>
-          </a:p>
-        </p:txBody>
-      </p:sp>
-      <p:sp>
-        <p:nvSpPr>
-          <p:cNvPr id="8" name="장식"/>
-          <p:cNvSpPr/>
-          <p:nvPr/>
-        </p:nvSpPr>
-        <p:spPr>
-          <a:xfrm>
-            <a:off x="9585710" y="1728216"/>
-            <a:ext cx="822959" cy="1152144"/>
-          </a:xfrm>
-          <a:prstGeom prst="roundRect">
-            <a:avLst/>
-          </a:prstGeom>
-          <a:solidFill>
-            <a:srgbClr val="F0D1D6"/>
-          </a:solidFill>
-          <a:ln>
-            <a:noFill/>
-          </a:ln>
-        </p:spPr>
-        <p:txBody>
-          <a:bodyPr rtlCol="0" anchor="ctr"/>
-          <a:lstStyle/>
-          <a:p>
-            <a:pPr algn="ctr"/>
-          </a:p>
-        </p:txBody>
-      </p:sp>
-      <p:sp>
-        <p:nvSpPr>
-          <p:cNvPr id="9" name="장식"/>
-          <p:cNvSpPr/>
-          <p:nvPr/>
-        </p:nvSpPr>
-        <p:spPr>
-          <a:xfrm>
-            <a:off x="9791450" y="1591056"/>
-            <a:ext cx="411479" cy="137160"/>
-          </a:xfrm>
-          <a:prstGeom prst="rect">
-            <a:avLst/>
-          </a:prstGeom>
-          <a:solidFill>
-            <a:srgbClr val="3B9158"/>
-          </a:solidFill>
-          <a:ln>
-            <a:noFill/>
-          </a:ln>
-        </p:spPr>
-        <p:txBody>
-          <a:bodyPr rtlCol="0" anchor="ctr"/>
-          <a:lstStyle/>
-          <a:p>
-            <a:pPr algn="ctr"/>
-          </a:p>
-        </p:txBody>
-      </p:sp>
-      <p:sp>
-        <p:nvSpPr>
-          <p:cNvPr id="10" name="장식"/>
-          <p:cNvSpPr/>
-          <p:nvPr/>
-        </p:nvSpPr>
-        <p:spPr>
-          <a:xfrm>
-            <a:off x="9791450" y="2880360"/>
-            <a:ext cx="411479" cy="137160"/>
-          </a:xfrm>
-          <a:prstGeom prst="rect">
-            <a:avLst/>
-          </a:prstGeom>
-          <a:solidFill>
-            <a:srgbClr val="3B9158"/>
-          </a:solidFill>
-          <a:ln>
-            <a:noFill/>
-          </a:ln>
-        </p:spPr>
-        <p:txBody>
-          <a:bodyPr rtlCol="0" anchor="ctr"/>
-          <a:lstStyle/>
-          <a:p>
-            <a:pPr algn="ctr"/>
-          </a:p>
-        </p:txBody>
-      </p:sp>
-      <p:sp>
-        <p:nvSpPr>
-          <p:cNvPr id="11" name="장식"/>
-          <p:cNvSpPr/>
-          <p:nvPr/>
-        </p:nvSpPr>
-        <p:spPr>
-          <a:xfrm>
-            <a:off x="10628126" y="1234440"/>
-            <a:ext cx="822959" cy="1371600"/>
-          </a:xfrm>
-          <a:prstGeom prst="roundRect">
-            <a:avLst/>
-          </a:prstGeom>
-          <a:solidFill>
-            <a:srgbClr val="3B9158"/>
-          </a:solidFill>
-          <a:ln>
-            <a:noFill/>
-          </a:ln>
-        </p:spPr>
-        <p:txBody>
-          <a:bodyPr rtlCol="0" anchor="ctr"/>
-          <a:lstStyle/>
-          <a:p>
-            <a:pPr algn="ctr"/>
-          </a:p>
-        </p:txBody>
-      </p:sp>
-      <p:sp>
-        <p:nvSpPr>
-          <p:cNvPr id="12" name="장식"/>
-          <p:cNvSpPr/>
-          <p:nvPr/>
-        </p:nvSpPr>
-        <p:spPr>
-          <a:xfrm>
-            <a:off x="10833866" y="1097280"/>
-            <a:ext cx="411479" cy="137160"/>
-          </a:xfrm>
-          <a:prstGeom prst="rect">
-            <a:avLst/>
-          </a:prstGeom>
-          <a:solidFill>
-            <a:srgbClr val="8D3443"/>
-          </a:solidFill>
-          <a:ln>
-            <a:noFill/>
-          </a:ln>
-        </p:spPr>
-        <p:txBody>
-          <a:bodyPr rtlCol="0" anchor="ctr"/>
-          <a:lstStyle/>
-          <a:p>
-            <a:pPr algn="ctr"/>
-          </a:p>
-        </p:txBody>
-      </p:sp>
-      <p:sp>
-        <p:nvSpPr>
-          <p:cNvPr id="13" name="장식"/>
-          <p:cNvSpPr/>
-          <p:nvPr/>
-        </p:nvSpPr>
-        <p:spPr>
-          <a:xfrm>
-            <a:off x="10833866" y="2606040"/>
-            <a:ext cx="411479" cy="137160"/>
-          </a:xfrm>
-          <a:prstGeom prst="rect">
-            <a:avLst/>
-          </a:prstGeom>
-          <a:solidFill>
-            <a:srgbClr val="8D3443"/>
-          </a:solidFill>
-          <a:ln>
-            <a:noFill/>
-          </a:ln>
-        </p:spPr>
-        <p:txBody>
-          <a:bodyPr rtlCol="0" anchor="ctr"/>
-          <a:lstStyle/>
-          <a:p>
-            <a:pPr algn="ctr"/>
-          </a:p>
-        </p:txBody>
-      </p:sp>
+        </p:spPr>
+      </p:pic>
       <p:sp>
         <p:nvSpPr>
           <p:cNvPr id="2" name="Title 1"/>
@@ -3632,8 +3329,8 @@
         </p:nvSpPr>
         <p:spPr>
           <a:xfrm>
-            <a:off x="975335" y="1371600"/>
-            <a:ext cx="7558851" cy="1463040"/>
+            <a:off x="853418" y="2057400"/>
+            <a:ext cx="6095847" cy="1554480"/>
           </a:xfrm>
         </p:spPr>
         <p:txBody>
@@ -3660,14 +3357,14 @@
       </p:sp>
       <p:sp>
         <p:nvSpPr>
-          <p:cNvPr id="14" name="한 줄 문구"/>
+          <p:cNvPr id="4" name="한 줄 문구"/>
           <p:cNvSpPr txBox="1"/>
           <p:nvPr/>
         </p:nvSpPr>
         <p:spPr>
           <a:xfrm>
-            <a:off x="975335" y="2926080"/>
-            <a:ext cx="7315017" cy="822960"/>
+            <a:off x="853418" y="3749039"/>
+            <a:ext cx="6095847" cy="822960"/>
           </a:xfrm>
           <a:prstGeom prst="rect">
             <a:avLst/>
@@ -3691,21 +3388,21 @@
                   <a:srgbClr val="431920"/>
                 </a:solidFill>
               </a:rPr>
-              <a:t>새해 첫 돌, 복 많이 받아라</a:t>
-            </a:r>
-          </a:p>
-        </p:txBody>
-      </p:sp>
-      <p:sp>
-        <p:nvSpPr>
-          <p:cNvPr id="15" name="안내 문구"/>
+              <a:t>눈 오던 날 찍은 사진이 마음에 듭니다</a:t>
+            </a:r>
+          </a:p>
+        </p:txBody>
+      </p:sp>
+      <p:sp>
+        <p:nvSpPr>
+          <p:cNvPr id="5" name="안내 문구"/>
           <p:cNvSpPr txBox="1"/>
           <p:nvPr/>
         </p:nvSpPr>
         <p:spPr>
           <a:xfrm>
-            <a:off x="975335" y="3794760"/>
-            <a:ext cx="7315017" cy="914400"/>
+            <a:off x="853418" y="4617720"/>
+            <a:ext cx="6095847" cy="914400"/>
           </a:xfrm>
           <a:prstGeom prst="rect">
             <a:avLst/>
@@ -3729,7 +3426,7 @@
                   <a:srgbClr val="666666"/>
                 </a:solidFill>
               </a:rPr>
-              <a:t>아기 이름 · 2026. 00. 00</a:t>
+              <a:t>아기 이름 · 2027. 00. 00</a:t>
             </a:r>
           </a:p>
           <a:p>
@@ -3835,267 +3532,6 @@
       </p:sp>
       <p:sp>
         <p:nvSpPr>
-          <p:cNvPr id="5" name="장식"/>
-          <p:cNvSpPr/>
-          <p:nvPr/>
-        </p:nvSpPr>
-        <p:spPr>
-          <a:xfrm>
-            <a:off x="10789920" y="525780"/>
-            <a:ext cx="301752" cy="502920"/>
-          </a:xfrm>
-          <a:prstGeom prst="roundRect">
-            <a:avLst/>
-          </a:prstGeom>
-          <a:solidFill>
-            <a:srgbClr val="8D3443"/>
-          </a:solidFill>
-          <a:ln>
-            <a:noFill/>
-          </a:ln>
-        </p:spPr>
-        <p:txBody>
-          <a:bodyPr rtlCol="0" anchor="ctr"/>
-          <a:lstStyle/>
-          <a:p>
-            <a:pPr algn="ctr"/>
-          </a:p>
-        </p:txBody>
-      </p:sp>
-      <p:sp>
-        <p:nvSpPr>
-          <p:cNvPr id="6" name="장식"/>
-          <p:cNvSpPr/>
-          <p:nvPr/>
-        </p:nvSpPr>
-        <p:spPr>
-          <a:xfrm>
-            <a:off x="10865358" y="475487"/>
-            <a:ext cx="150876" cy="50292"/>
-          </a:xfrm>
-          <a:prstGeom prst="rect">
-            <a:avLst/>
-          </a:prstGeom>
-          <a:solidFill>
-            <a:srgbClr val="3B9158"/>
-          </a:solidFill>
-          <a:ln>
-            <a:noFill/>
-          </a:ln>
-        </p:spPr>
-        <p:txBody>
-          <a:bodyPr rtlCol="0" anchor="ctr"/>
-          <a:lstStyle/>
-          <a:p>
-            <a:pPr algn="ctr"/>
-          </a:p>
-        </p:txBody>
-      </p:sp>
-      <p:sp>
-        <p:nvSpPr>
-          <p:cNvPr id="7" name="장식"/>
-          <p:cNvSpPr/>
-          <p:nvPr/>
-        </p:nvSpPr>
-        <p:spPr>
-          <a:xfrm>
-            <a:off x="10865358" y="1028700"/>
-            <a:ext cx="150876" cy="50292"/>
-          </a:xfrm>
-          <a:prstGeom prst="rect">
-            <a:avLst/>
-          </a:prstGeom>
-          <a:solidFill>
-            <a:srgbClr val="3B9158"/>
-          </a:solidFill>
-          <a:ln>
-            <a:noFill/>
-          </a:ln>
-        </p:spPr>
-        <p:txBody>
-          <a:bodyPr rtlCol="0" anchor="ctr"/>
-          <a:lstStyle/>
-          <a:p>
-            <a:pPr algn="ctr"/>
-          </a:p>
-        </p:txBody>
-      </p:sp>
-      <p:sp>
-        <p:nvSpPr>
-          <p:cNvPr id="8" name="장식"/>
-          <p:cNvSpPr/>
-          <p:nvPr/>
-        </p:nvSpPr>
-        <p:spPr>
-          <a:xfrm>
-            <a:off x="11172139" y="706831"/>
-            <a:ext cx="301752" cy="422452"/>
-          </a:xfrm>
-          <a:prstGeom prst="roundRect">
-            <a:avLst/>
-          </a:prstGeom>
-          <a:solidFill>
-            <a:srgbClr val="F0D1D6"/>
-          </a:solidFill>
-          <a:ln>
-            <a:noFill/>
-          </a:ln>
-        </p:spPr>
-        <p:txBody>
-          <a:bodyPr rtlCol="0" anchor="ctr"/>
-          <a:lstStyle/>
-          <a:p>
-            <a:pPr algn="ctr"/>
-          </a:p>
-        </p:txBody>
-      </p:sp>
-      <p:sp>
-        <p:nvSpPr>
-          <p:cNvPr id="9" name="장식"/>
-          <p:cNvSpPr/>
-          <p:nvPr/>
-        </p:nvSpPr>
-        <p:spPr>
-          <a:xfrm>
-            <a:off x="11247577" y="656539"/>
-            <a:ext cx="150876" cy="50292"/>
-          </a:xfrm>
-          <a:prstGeom prst="rect">
-            <a:avLst/>
-          </a:prstGeom>
-          <a:solidFill>
-            <a:srgbClr val="3B9158"/>
-          </a:solidFill>
-          <a:ln>
-            <a:noFill/>
-          </a:ln>
-        </p:spPr>
-        <p:txBody>
-          <a:bodyPr rtlCol="0" anchor="ctr"/>
-          <a:lstStyle/>
-          <a:p>
-            <a:pPr algn="ctr"/>
-          </a:p>
-        </p:txBody>
-      </p:sp>
-      <p:sp>
-        <p:nvSpPr>
-          <p:cNvPr id="10" name="장식"/>
-          <p:cNvSpPr/>
-          <p:nvPr/>
-        </p:nvSpPr>
-        <p:spPr>
-          <a:xfrm>
-            <a:off x="11247577" y="1129284"/>
-            <a:ext cx="150876" cy="50292"/>
-          </a:xfrm>
-          <a:prstGeom prst="rect">
-            <a:avLst/>
-          </a:prstGeom>
-          <a:solidFill>
-            <a:srgbClr val="3B9158"/>
-          </a:solidFill>
-          <a:ln>
-            <a:noFill/>
-          </a:ln>
-        </p:spPr>
-        <p:txBody>
-          <a:bodyPr rtlCol="0" anchor="ctr"/>
-          <a:lstStyle/>
-          <a:p>
-            <a:pPr algn="ctr"/>
-          </a:p>
-        </p:txBody>
-      </p:sp>
-      <p:sp>
-        <p:nvSpPr>
-          <p:cNvPr id="11" name="장식"/>
-          <p:cNvSpPr/>
-          <p:nvPr/>
-        </p:nvSpPr>
-        <p:spPr>
-          <a:xfrm>
-            <a:off x="11554358" y="525780"/>
-            <a:ext cx="301752" cy="502920"/>
-          </a:xfrm>
-          <a:prstGeom prst="roundRect">
-            <a:avLst/>
-          </a:prstGeom>
-          <a:solidFill>
-            <a:srgbClr val="3B9158"/>
-          </a:solidFill>
-          <a:ln>
-            <a:noFill/>
-          </a:ln>
-        </p:spPr>
-        <p:txBody>
-          <a:bodyPr rtlCol="0" anchor="ctr"/>
-          <a:lstStyle/>
-          <a:p>
-            <a:pPr algn="ctr"/>
-          </a:p>
-        </p:txBody>
-      </p:sp>
-      <p:sp>
-        <p:nvSpPr>
-          <p:cNvPr id="12" name="장식"/>
-          <p:cNvSpPr/>
-          <p:nvPr/>
-        </p:nvSpPr>
-        <p:spPr>
-          <a:xfrm>
-            <a:off x="11629796" y="475487"/>
-            <a:ext cx="150876" cy="50292"/>
-          </a:xfrm>
-          <a:prstGeom prst="rect">
-            <a:avLst/>
-          </a:prstGeom>
-          <a:solidFill>
-            <a:srgbClr val="8D3443"/>
-          </a:solidFill>
-          <a:ln>
-            <a:noFill/>
-          </a:ln>
-        </p:spPr>
-        <p:txBody>
-          <a:bodyPr rtlCol="0" anchor="ctr"/>
-          <a:lstStyle/>
-          <a:p>
-            <a:pPr algn="ctr"/>
-          </a:p>
-        </p:txBody>
-      </p:sp>
-      <p:sp>
-        <p:nvSpPr>
-          <p:cNvPr id="13" name="장식"/>
-          <p:cNvSpPr/>
-          <p:nvPr/>
-        </p:nvSpPr>
-        <p:spPr>
-          <a:xfrm>
-            <a:off x="11629796" y="1028700"/>
-            <a:ext cx="150876" cy="50292"/>
-          </a:xfrm>
-          <a:prstGeom prst="rect">
-            <a:avLst/>
-          </a:prstGeom>
-          <a:solidFill>
-            <a:srgbClr val="8D3443"/>
-          </a:solidFill>
-          <a:ln>
-            <a:noFill/>
-          </a:ln>
-        </p:spPr>
-        <p:txBody>
-          <a:bodyPr rtlCol="0" anchor="ctr"/>
-          <a:lstStyle/>
-          <a:p>
-            <a:pPr algn="ctr"/>
-          </a:p>
-        </p:txBody>
-      </p:sp>
-      <p:sp>
-        <p:nvSpPr>
           <p:cNvPr id="2" name="Title 1"/>
           <p:cNvSpPr>
             <a:spLocks noGrp="1"/>
@@ -4134,7 +3570,7 @@
       </p:sp>
       <p:sp>
         <p:nvSpPr>
-          <p:cNvPr id="14" name="사진 자리"/>
+          <p:cNvPr id="5" name="사진 자리"/>
           <p:cNvSpPr/>
           <p:nvPr/>
         </p:nvSpPr>
@@ -4182,7 +3618,7 @@
       </p:sp>
       <p:graphicFrame>
         <p:nvGraphicFramePr>
-          <p:cNvPr id="15" name="표"/>
+          <p:cNvPr id="6" name="표"/>
           <p:cNvGraphicFramePr>
             <a:graphicFrameLocks noGrp="1"/>
           </p:cNvGraphicFramePr>
@@ -4856,267 +4292,6 @@
       </p:sp>
       <p:sp>
         <p:nvSpPr>
-          <p:cNvPr id="5" name="장식"/>
-          <p:cNvSpPr/>
-          <p:nvPr/>
-        </p:nvSpPr>
-        <p:spPr>
-          <a:xfrm>
-            <a:off x="10789920" y="525780"/>
-            <a:ext cx="301752" cy="502920"/>
-          </a:xfrm>
-          <a:prstGeom prst="roundRect">
-            <a:avLst/>
-          </a:prstGeom>
-          <a:solidFill>
-            <a:srgbClr val="8D3443"/>
-          </a:solidFill>
-          <a:ln>
-            <a:noFill/>
-          </a:ln>
-        </p:spPr>
-        <p:txBody>
-          <a:bodyPr rtlCol="0" anchor="ctr"/>
-          <a:lstStyle/>
-          <a:p>
-            <a:pPr algn="ctr"/>
-          </a:p>
-        </p:txBody>
-      </p:sp>
-      <p:sp>
-        <p:nvSpPr>
-          <p:cNvPr id="6" name="장식"/>
-          <p:cNvSpPr/>
-          <p:nvPr/>
-        </p:nvSpPr>
-        <p:spPr>
-          <a:xfrm>
-            <a:off x="10865358" y="475487"/>
-            <a:ext cx="150876" cy="50292"/>
-          </a:xfrm>
-          <a:prstGeom prst="rect">
-            <a:avLst/>
-          </a:prstGeom>
-          <a:solidFill>
-            <a:srgbClr val="3B9158"/>
-          </a:solidFill>
-          <a:ln>
-            <a:noFill/>
-          </a:ln>
-        </p:spPr>
-        <p:txBody>
-          <a:bodyPr rtlCol="0" anchor="ctr"/>
-          <a:lstStyle/>
-          <a:p>
-            <a:pPr algn="ctr"/>
-          </a:p>
-        </p:txBody>
-      </p:sp>
-      <p:sp>
-        <p:nvSpPr>
-          <p:cNvPr id="7" name="장식"/>
-          <p:cNvSpPr/>
-          <p:nvPr/>
-        </p:nvSpPr>
-        <p:spPr>
-          <a:xfrm>
-            <a:off x="10865358" y="1028700"/>
-            <a:ext cx="150876" cy="50292"/>
-          </a:xfrm>
-          <a:prstGeom prst="rect">
-            <a:avLst/>
-          </a:prstGeom>
-          <a:solidFill>
-            <a:srgbClr val="3B9158"/>
-          </a:solidFill>
-          <a:ln>
-            <a:noFill/>
-          </a:ln>
-        </p:spPr>
-        <p:txBody>
-          <a:bodyPr rtlCol="0" anchor="ctr"/>
-          <a:lstStyle/>
-          <a:p>
-            <a:pPr algn="ctr"/>
-          </a:p>
-        </p:txBody>
-      </p:sp>
-      <p:sp>
-        <p:nvSpPr>
-          <p:cNvPr id="8" name="장식"/>
-          <p:cNvSpPr/>
-          <p:nvPr/>
-        </p:nvSpPr>
-        <p:spPr>
-          <a:xfrm>
-            <a:off x="11172139" y="706831"/>
-            <a:ext cx="301752" cy="422452"/>
-          </a:xfrm>
-          <a:prstGeom prst="roundRect">
-            <a:avLst/>
-          </a:prstGeom>
-          <a:solidFill>
-            <a:srgbClr val="F0D1D6"/>
-          </a:solidFill>
-          <a:ln>
-            <a:noFill/>
-          </a:ln>
-        </p:spPr>
-        <p:txBody>
-          <a:bodyPr rtlCol="0" anchor="ctr"/>
-          <a:lstStyle/>
-          <a:p>
-            <a:pPr algn="ctr"/>
-          </a:p>
-        </p:txBody>
-      </p:sp>
-      <p:sp>
-        <p:nvSpPr>
-          <p:cNvPr id="9" name="장식"/>
-          <p:cNvSpPr/>
-          <p:nvPr/>
-        </p:nvSpPr>
-        <p:spPr>
-          <a:xfrm>
-            <a:off x="11247577" y="656539"/>
-            <a:ext cx="150876" cy="50292"/>
-          </a:xfrm>
-          <a:prstGeom prst="rect">
-            <a:avLst/>
-          </a:prstGeom>
-          <a:solidFill>
-            <a:srgbClr val="3B9158"/>
-          </a:solidFill>
-          <a:ln>
-            <a:noFill/>
-          </a:ln>
-        </p:spPr>
-        <p:txBody>
-          <a:bodyPr rtlCol="0" anchor="ctr"/>
-          <a:lstStyle/>
-          <a:p>
-            <a:pPr algn="ctr"/>
-          </a:p>
-        </p:txBody>
-      </p:sp>
-      <p:sp>
-        <p:nvSpPr>
-          <p:cNvPr id="10" name="장식"/>
-          <p:cNvSpPr/>
-          <p:nvPr/>
-        </p:nvSpPr>
-        <p:spPr>
-          <a:xfrm>
-            <a:off x="11247577" y="1129284"/>
-            <a:ext cx="150876" cy="50292"/>
-          </a:xfrm>
-          <a:prstGeom prst="rect">
-            <a:avLst/>
-          </a:prstGeom>
-          <a:solidFill>
-            <a:srgbClr val="3B9158"/>
-          </a:solidFill>
-          <a:ln>
-            <a:noFill/>
-          </a:ln>
-        </p:spPr>
-        <p:txBody>
-          <a:bodyPr rtlCol="0" anchor="ctr"/>
-          <a:lstStyle/>
-          <a:p>
-            <a:pPr algn="ctr"/>
-          </a:p>
-        </p:txBody>
-      </p:sp>
-      <p:sp>
-        <p:nvSpPr>
-          <p:cNvPr id="11" name="장식"/>
-          <p:cNvSpPr/>
-          <p:nvPr/>
-        </p:nvSpPr>
-        <p:spPr>
-          <a:xfrm>
-            <a:off x="11554358" y="525780"/>
-            <a:ext cx="301752" cy="502920"/>
-          </a:xfrm>
-          <a:prstGeom prst="roundRect">
-            <a:avLst/>
-          </a:prstGeom>
-          <a:solidFill>
-            <a:srgbClr val="3B9158"/>
-          </a:solidFill>
-          <a:ln>
-            <a:noFill/>
-          </a:ln>
-        </p:spPr>
-        <p:txBody>
-          <a:bodyPr rtlCol="0" anchor="ctr"/>
-          <a:lstStyle/>
-          <a:p>
-            <a:pPr algn="ctr"/>
-          </a:p>
-        </p:txBody>
-      </p:sp>
-      <p:sp>
-        <p:nvSpPr>
-          <p:cNvPr id="12" name="장식"/>
-          <p:cNvSpPr/>
-          <p:nvPr/>
-        </p:nvSpPr>
-        <p:spPr>
-          <a:xfrm>
-            <a:off x="11629796" y="475487"/>
-            <a:ext cx="150876" cy="50292"/>
-          </a:xfrm>
-          <a:prstGeom prst="rect">
-            <a:avLst/>
-          </a:prstGeom>
-          <a:solidFill>
-            <a:srgbClr val="8D3443"/>
-          </a:solidFill>
-          <a:ln>
-            <a:noFill/>
-          </a:ln>
-        </p:spPr>
-        <p:txBody>
-          <a:bodyPr rtlCol="0" anchor="ctr"/>
-          <a:lstStyle/>
-          <a:p>
-            <a:pPr algn="ctr"/>
-          </a:p>
-        </p:txBody>
-      </p:sp>
-      <p:sp>
-        <p:nvSpPr>
-          <p:cNvPr id="13" name="장식"/>
-          <p:cNvSpPr/>
-          <p:nvPr/>
-        </p:nvSpPr>
-        <p:spPr>
-          <a:xfrm>
-            <a:off x="11629796" y="1028700"/>
-            <a:ext cx="150876" cy="50292"/>
-          </a:xfrm>
-          <a:prstGeom prst="rect">
-            <a:avLst/>
-          </a:prstGeom>
-          <a:solidFill>
-            <a:srgbClr val="8D3443"/>
-          </a:solidFill>
-          <a:ln>
-            <a:noFill/>
-          </a:ln>
-        </p:spPr>
-        <p:txBody>
-          <a:bodyPr rtlCol="0" anchor="ctr"/>
-          <a:lstStyle/>
-          <a:p>
-            <a:pPr algn="ctr"/>
-          </a:p>
-        </p:txBody>
-      </p:sp>
-      <p:sp>
-        <p:nvSpPr>
           <p:cNvPr id="2" name="Title 1"/>
           <p:cNvSpPr>
             <a:spLocks noGrp="1"/>
@@ -5155,7 +4330,7 @@
       </p:sp>
       <p:sp>
         <p:nvSpPr>
-          <p:cNvPr id="14" name="사진 자리"/>
+          <p:cNvPr id="5" name="사진 자리"/>
           <p:cNvSpPr/>
           <p:nvPr/>
         </p:nvSpPr>
@@ -5203,7 +4378,7 @@
       </p:sp>
       <p:sp>
         <p:nvSpPr>
-          <p:cNvPr id="15" name="사진 자리"/>
+          <p:cNvPr id="6" name="사진 자리"/>
           <p:cNvSpPr/>
           <p:nvPr/>
         </p:nvSpPr>
@@ -5335,267 +4510,6 @@
       </p:sp>
       <p:sp>
         <p:nvSpPr>
-          <p:cNvPr id="5" name="장식"/>
-          <p:cNvSpPr/>
-          <p:nvPr/>
-        </p:nvSpPr>
-        <p:spPr>
-          <a:xfrm>
-            <a:off x="10789920" y="525780"/>
-            <a:ext cx="301752" cy="502920"/>
-          </a:xfrm>
-          <a:prstGeom prst="roundRect">
-            <a:avLst/>
-          </a:prstGeom>
-          <a:solidFill>
-            <a:srgbClr val="8D3443"/>
-          </a:solidFill>
-          <a:ln>
-            <a:noFill/>
-          </a:ln>
-        </p:spPr>
-        <p:txBody>
-          <a:bodyPr rtlCol="0" anchor="ctr"/>
-          <a:lstStyle/>
-          <a:p>
-            <a:pPr algn="ctr"/>
-          </a:p>
-        </p:txBody>
-      </p:sp>
-      <p:sp>
-        <p:nvSpPr>
-          <p:cNvPr id="6" name="장식"/>
-          <p:cNvSpPr/>
-          <p:nvPr/>
-        </p:nvSpPr>
-        <p:spPr>
-          <a:xfrm>
-            <a:off x="10865358" y="475487"/>
-            <a:ext cx="150876" cy="50292"/>
-          </a:xfrm>
-          <a:prstGeom prst="rect">
-            <a:avLst/>
-          </a:prstGeom>
-          <a:solidFill>
-            <a:srgbClr val="3B9158"/>
-          </a:solidFill>
-          <a:ln>
-            <a:noFill/>
-          </a:ln>
-        </p:spPr>
-        <p:txBody>
-          <a:bodyPr rtlCol="0" anchor="ctr"/>
-          <a:lstStyle/>
-          <a:p>
-            <a:pPr algn="ctr"/>
-          </a:p>
-        </p:txBody>
-      </p:sp>
-      <p:sp>
-        <p:nvSpPr>
-          <p:cNvPr id="7" name="장식"/>
-          <p:cNvSpPr/>
-          <p:nvPr/>
-        </p:nvSpPr>
-        <p:spPr>
-          <a:xfrm>
-            <a:off x="10865358" y="1028700"/>
-            <a:ext cx="150876" cy="50292"/>
-          </a:xfrm>
-          <a:prstGeom prst="rect">
-            <a:avLst/>
-          </a:prstGeom>
-          <a:solidFill>
-            <a:srgbClr val="3B9158"/>
-          </a:solidFill>
-          <a:ln>
-            <a:noFill/>
-          </a:ln>
-        </p:spPr>
-        <p:txBody>
-          <a:bodyPr rtlCol="0" anchor="ctr"/>
-          <a:lstStyle/>
-          <a:p>
-            <a:pPr algn="ctr"/>
-          </a:p>
-        </p:txBody>
-      </p:sp>
-      <p:sp>
-        <p:nvSpPr>
-          <p:cNvPr id="8" name="장식"/>
-          <p:cNvSpPr/>
-          <p:nvPr/>
-        </p:nvSpPr>
-        <p:spPr>
-          <a:xfrm>
-            <a:off x="11172139" y="706831"/>
-            <a:ext cx="301752" cy="422452"/>
-          </a:xfrm>
-          <a:prstGeom prst="roundRect">
-            <a:avLst/>
-          </a:prstGeom>
-          <a:solidFill>
-            <a:srgbClr val="F0D1D6"/>
-          </a:solidFill>
-          <a:ln>
-            <a:noFill/>
-          </a:ln>
-        </p:spPr>
-        <p:txBody>
-          <a:bodyPr rtlCol="0" anchor="ctr"/>
-          <a:lstStyle/>
-          <a:p>
-            <a:pPr algn="ctr"/>
-          </a:p>
-        </p:txBody>
-      </p:sp>
-      <p:sp>
-        <p:nvSpPr>
-          <p:cNvPr id="9" name="장식"/>
-          <p:cNvSpPr/>
-          <p:nvPr/>
-        </p:nvSpPr>
-        <p:spPr>
-          <a:xfrm>
-            <a:off x="11247577" y="656539"/>
-            <a:ext cx="150876" cy="50292"/>
-          </a:xfrm>
-          <a:prstGeom prst="rect">
-            <a:avLst/>
-          </a:prstGeom>
-          <a:solidFill>
-            <a:srgbClr val="3B9158"/>
-          </a:solidFill>
-          <a:ln>
-            <a:noFill/>
-          </a:ln>
-        </p:spPr>
-        <p:txBody>
-          <a:bodyPr rtlCol="0" anchor="ctr"/>
-          <a:lstStyle/>
-          <a:p>
-            <a:pPr algn="ctr"/>
-          </a:p>
-        </p:txBody>
-      </p:sp>
-      <p:sp>
-        <p:nvSpPr>
-          <p:cNvPr id="10" name="장식"/>
-          <p:cNvSpPr/>
-          <p:nvPr/>
-        </p:nvSpPr>
-        <p:spPr>
-          <a:xfrm>
-            <a:off x="11247577" y="1129284"/>
-            <a:ext cx="150876" cy="50292"/>
-          </a:xfrm>
-          <a:prstGeom prst="rect">
-            <a:avLst/>
-          </a:prstGeom>
-          <a:solidFill>
-            <a:srgbClr val="3B9158"/>
-          </a:solidFill>
-          <a:ln>
-            <a:noFill/>
-          </a:ln>
-        </p:spPr>
-        <p:txBody>
-          <a:bodyPr rtlCol="0" anchor="ctr"/>
-          <a:lstStyle/>
-          <a:p>
-            <a:pPr algn="ctr"/>
-          </a:p>
-        </p:txBody>
-      </p:sp>
-      <p:sp>
-        <p:nvSpPr>
-          <p:cNvPr id="11" name="장식"/>
-          <p:cNvSpPr/>
-          <p:nvPr/>
-        </p:nvSpPr>
-        <p:spPr>
-          <a:xfrm>
-            <a:off x="11554358" y="525780"/>
-            <a:ext cx="301752" cy="502920"/>
-          </a:xfrm>
-          <a:prstGeom prst="roundRect">
-            <a:avLst/>
-          </a:prstGeom>
-          <a:solidFill>
-            <a:srgbClr val="3B9158"/>
-          </a:solidFill>
-          <a:ln>
-            <a:noFill/>
-          </a:ln>
-        </p:spPr>
-        <p:txBody>
-          <a:bodyPr rtlCol="0" anchor="ctr"/>
-          <a:lstStyle/>
-          <a:p>
-            <a:pPr algn="ctr"/>
-          </a:p>
-        </p:txBody>
-      </p:sp>
-      <p:sp>
-        <p:nvSpPr>
-          <p:cNvPr id="12" name="장식"/>
-          <p:cNvSpPr/>
-          <p:nvPr/>
-        </p:nvSpPr>
-        <p:spPr>
-          <a:xfrm>
-            <a:off x="11629796" y="475487"/>
-            <a:ext cx="150876" cy="50292"/>
-          </a:xfrm>
-          <a:prstGeom prst="rect">
-            <a:avLst/>
-          </a:prstGeom>
-          <a:solidFill>
-            <a:srgbClr val="8D3443"/>
-          </a:solidFill>
-          <a:ln>
-            <a:noFill/>
-          </a:ln>
-        </p:spPr>
-        <p:txBody>
-          <a:bodyPr rtlCol="0" anchor="ctr"/>
-          <a:lstStyle/>
-          <a:p>
-            <a:pPr algn="ctr"/>
-          </a:p>
-        </p:txBody>
-      </p:sp>
-      <p:sp>
-        <p:nvSpPr>
-          <p:cNvPr id="13" name="장식"/>
-          <p:cNvSpPr/>
-          <p:nvPr/>
-        </p:nvSpPr>
-        <p:spPr>
-          <a:xfrm>
-            <a:off x="11629796" y="1028700"/>
-            <a:ext cx="150876" cy="50292"/>
-          </a:xfrm>
-          <a:prstGeom prst="rect">
-            <a:avLst/>
-          </a:prstGeom>
-          <a:solidFill>
-            <a:srgbClr val="8D3443"/>
-          </a:solidFill>
-          <a:ln>
-            <a:noFill/>
-          </a:ln>
-        </p:spPr>
-        <p:txBody>
-          <a:bodyPr rtlCol="0" anchor="ctr"/>
-          <a:lstStyle/>
-          <a:p>
-            <a:pPr algn="ctr"/>
-          </a:p>
-        </p:txBody>
-      </p:sp>
-      <p:sp>
-        <p:nvSpPr>
           <p:cNvPr id="2" name="Title 1"/>
           <p:cNvSpPr>
             <a:spLocks noGrp="1"/>
@@ -5634,7 +4548,7 @@
       </p:sp>
       <p:sp>
         <p:nvSpPr>
-          <p:cNvPr id="14" name="사진 자리"/>
+          <p:cNvPr id="5" name="사진 자리"/>
           <p:cNvSpPr/>
           <p:nvPr/>
         </p:nvSpPr>
@@ -5682,7 +4596,7 @@
       </p:sp>
       <p:sp>
         <p:nvSpPr>
-          <p:cNvPr id="15" name="사진 자리"/>
+          <p:cNvPr id="6" name="사진 자리"/>
           <p:cNvSpPr/>
           <p:nvPr/>
         </p:nvSpPr>
@@ -5730,7 +4644,7 @@
       </p:sp>
       <p:sp>
         <p:nvSpPr>
-          <p:cNvPr id="16" name="사진 자리"/>
+          <p:cNvPr id="7" name="사진 자리"/>
           <p:cNvSpPr/>
           <p:nvPr/>
         </p:nvSpPr>
@@ -5778,7 +4692,7 @@
       </p:sp>
       <p:sp>
         <p:nvSpPr>
-          <p:cNvPr id="17" name="사진 자리"/>
+          <p:cNvPr id="8" name="사진 자리"/>
           <p:cNvSpPr/>
           <p:nvPr/>
         </p:nvSpPr>
@@ -5826,7 +4740,7 @@
       </p:sp>
       <p:sp>
         <p:nvSpPr>
-          <p:cNvPr id="18" name="사진 자리"/>
+          <p:cNvPr id="9" name="사진 자리"/>
           <p:cNvSpPr/>
           <p:nvPr/>
         </p:nvSpPr>
@@ -5874,7 +4788,7 @@
       </p:sp>
       <p:sp>
         <p:nvSpPr>
-          <p:cNvPr id="19" name="사진 자리"/>
+          <p:cNvPr id="10" name="사진 자리"/>
           <p:cNvSpPr/>
           <p:nvPr/>
         </p:nvSpPr>
@@ -6006,267 +4920,6 @@
       </p:sp>
       <p:sp>
         <p:nvSpPr>
-          <p:cNvPr id="5" name="장식"/>
-          <p:cNvSpPr/>
-          <p:nvPr/>
-        </p:nvSpPr>
-        <p:spPr>
-          <a:xfrm>
-            <a:off x="10789920" y="525780"/>
-            <a:ext cx="301752" cy="502920"/>
-          </a:xfrm>
-          <a:prstGeom prst="roundRect">
-            <a:avLst/>
-          </a:prstGeom>
-          <a:solidFill>
-            <a:srgbClr val="8D3443"/>
-          </a:solidFill>
-          <a:ln>
-            <a:noFill/>
-          </a:ln>
-        </p:spPr>
-        <p:txBody>
-          <a:bodyPr rtlCol="0" anchor="ctr"/>
-          <a:lstStyle/>
-          <a:p>
-            <a:pPr algn="ctr"/>
-          </a:p>
-        </p:txBody>
-      </p:sp>
-      <p:sp>
-        <p:nvSpPr>
-          <p:cNvPr id="6" name="장식"/>
-          <p:cNvSpPr/>
-          <p:nvPr/>
-        </p:nvSpPr>
-        <p:spPr>
-          <a:xfrm>
-            <a:off x="10865358" y="475487"/>
-            <a:ext cx="150876" cy="50292"/>
-          </a:xfrm>
-          <a:prstGeom prst="rect">
-            <a:avLst/>
-          </a:prstGeom>
-          <a:solidFill>
-            <a:srgbClr val="3B9158"/>
-          </a:solidFill>
-          <a:ln>
-            <a:noFill/>
-          </a:ln>
-        </p:spPr>
-        <p:txBody>
-          <a:bodyPr rtlCol="0" anchor="ctr"/>
-          <a:lstStyle/>
-          <a:p>
-            <a:pPr algn="ctr"/>
-          </a:p>
-        </p:txBody>
-      </p:sp>
-      <p:sp>
-        <p:nvSpPr>
-          <p:cNvPr id="7" name="장식"/>
-          <p:cNvSpPr/>
-          <p:nvPr/>
-        </p:nvSpPr>
-        <p:spPr>
-          <a:xfrm>
-            <a:off x="10865358" y="1028700"/>
-            <a:ext cx="150876" cy="50292"/>
-          </a:xfrm>
-          <a:prstGeom prst="rect">
-            <a:avLst/>
-          </a:prstGeom>
-          <a:solidFill>
-            <a:srgbClr val="3B9158"/>
-          </a:solidFill>
-          <a:ln>
-            <a:noFill/>
-          </a:ln>
-        </p:spPr>
-        <p:txBody>
-          <a:bodyPr rtlCol="0" anchor="ctr"/>
-          <a:lstStyle/>
-          <a:p>
-            <a:pPr algn="ctr"/>
-          </a:p>
-        </p:txBody>
-      </p:sp>
-      <p:sp>
-        <p:nvSpPr>
-          <p:cNvPr id="8" name="장식"/>
-          <p:cNvSpPr/>
-          <p:nvPr/>
-        </p:nvSpPr>
-        <p:spPr>
-          <a:xfrm>
-            <a:off x="11172139" y="706831"/>
-            <a:ext cx="301752" cy="422452"/>
-          </a:xfrm>
-          <a:prstGeom prst="roundRect">
-            <a:avLst/>
-          </a:prstGeom>
-          <a:solidFill>
-            <a:srgbClr val="F0D1D6"/>
-          </a:solidFill>
-          <a:ln>
-            <a:noFill/>
-          </a:ln>
-        </p:spPr>
-        <p:txBody>
-          <a:bodyPr rtlCol="0" anchor="ctr"/>
-          <a:lstStyle/>
-          <a:p>
-            <a:pPr algn="ctr"/>
-          </a:p>
-        </p:txBody>
-      </p:sp>
-      <p:sp>
-        <p:nvSpPr>
-          <p:cNvPr id="9" name="장식"/>
-          <p:cNvSpPr/>
-          <p:nvPr/>
-        </p:nvSpPr>
-        <p:spPr>
-          <a:xfrm>
-            <a:off x="11247577" y="656539"/>
-            <a:ext cx="150876" cy="50292"/>
-          </a:xfrm>
-          <a:prstGeom prst="rect">
-            <a:avLst/>
-          </a:prstGeom>
-          <a:solidFill>
-            <a:srgbClr val="3B9158"/>
-          </a:solidFill>
-          <a:ln>
-            <a:noFill/>
-          </a:ln>
-        </p:spPr>
-        <p:txBody>
-          <a:bodyPr rtlCol="0" anchor="ctr"/>
-          <a:lstStyle/>
-          <a:p>
-            <a:pPr algn="ctr"/>
-          </a:p>
-        </p:txBody>
-      </p:sp>
-      <p:sp>
-        <p:nvSpPr>
-          <p:cNvPr id="10" name="장식"/>
-          <p:cNvSpPr/>
-          <p:nvPr/>
-        </p:nvSpPr>
-        <p:spPr>
-          <a:xfrm>
-            <a:off x="11247577" y="1129284"/>
-            <a:ext cx="150876" cy="50292"/>
-          </a:xfrm>
-          <a:prstGeom prst="rect">
-            <a:avLst/>
-          </a:prstGeom>
-          <a:solidFill>
-            <a:srgbClr val="3B9158"/>
-          </a:solidFill>
-          <a:ln>
-            <a:noFill/>
-          </a:ln>
-        </p:spPr>
-        <p:txBody>
-          <a:bodyPr rtlCol="0" anchor="ctr"/>
-          <a:lstStyle/>
-          <a:p>
-            <a:pPr algn="ctr"/>
-          </a:p>
-        </p:txBody>
-      </p:sp>
-      <p:sp>
-        <p:nvSpPr>
-          <p:cNvPr id="11" name="장식"/>
-          <p:cNvSpPr/>
-          <p:nvPr/>
-        </p:nvSpPr>
-        <p:spPr>
-          <a:xfrm>
-            <a:off x="11554358" y="525780"/>
-            <a:ext cx="301752" cy="502920"/>
-          </a:xfrm>
-          <a:prstGeom prst="roundRect">
-            <a:avLst/>
-          </a:prstGeom>
-          <a:solidFill>
-            <a:srgbClr val="3B9158"/>
-          </a:solidFill>
-          <a:ln>
-            <a:noFill/>
-          </a:ln>
-        </p:spPr>
-        <p:txBody>
-          <a:bodyPr rtlCol="0" anchor="ctr"/>
-          <a:lstStyle/>
-          <a:p>
-            <a:pPr algn="ctr"/>
-          </a:p>
-        </p:txBody>
-      </p:sp>
-      <p:sp>
-        <p:nvSpPr>
-          <p:cNvPr id="12" name="장식"/>
-          <p:cNvSpPr/>
-          <p:nvPr/>
-        </p:nvSpPr>
-        <p:spPr>
-          <a:xfrm>
-            <a:off x="11629796" y="475487"/>
-            <a:ext cx="150876" cy="50292"/>
-          </a:xfrm>
-          <a:prstGeom prst="rect">
-            <a:avLst/>
-          </a:prstGeom>
-          <a:solidFill>
-            <a:srgbClr val="8D3443"/>
-          </a:solidFill>
-          <a:ln>
-            <a:noFill/>
-          </a:ln>
-        </p:spPr>
-        <p:txBody>
-          <a:bodyPr rtlCol="0" anchor="ctr"/>
-          <a:lstStyle/>
-          <a:p>
-            <a:pPr algn="ctr"/>
-          </a:p>
-        </p:txBody>
-      </p:sp>
-      <p:sp>
-        <p:nvSpPr>
-          <p:cNvPr id="13" name="장식"/>
-          <p:cNvSpPr/>
-          <p:nvPr/>
-        </p:nvSpPr>
-        <p:spPr>
-          <a:xfrm>
-            <a:off x="11629796" y="1028700"/>
-            <a:ext cx="150876" cy="50292"/>
-          </a:xfrm>
-          <a:prstGeom prst="rect">
-            <a:avLst/>
-          </a:prstGeom>
-          <a:solidFill>
-            <a:srgbClr val="8D3443"/>
-          </a:solidFill>
-          <a:ln>
-            <a:noFill/>
-          </a:ln>
-        </p:spPr>
-        <p:txBody>
-          <a:bodyPr rtlCol="0" anchor="ctr"/>
-          <a:lstStyle/>
-          <a:p>
-            <a:pPr algn="ctr"/>
-          </a:p>
-        </p:txBody>
-      </p:sp>
-      <p:sp>
-        <p:nvSpPr>
           <p:cNvPr id="2" name="Title 1"/>
           <p:cNvSpPr>
             <a:spLocks noGrp="1"/>
@@ -6305,7 +4958,7 @@
       </p:sp>
       <p:sp>
         <p:nvSpPr>
-          <p:cNvPr id="14" name="사진 자리"/>
+          <p:cNvPr id="5" name="사진 자리"/>
           <p:cNvSpPr/>
           <p:nvPr/>
         </p:nvSpPr>
@@ -6353,7 +5006,7 @@
       </p:sp>
       <p:sp>
         <p:nvSpPr>
-          <p:cNvPr id="15" name="사진 자리"/>
+          <p:cNvPr id="6" name="사진 자리"/>
           <p:cNvSpPr/>
           <p:nvPr/>
         </p:nvSpPr>
@@ -6401,7 +5054,7 @@
       </p:sp>
       <p:sp>
         <p:nvSpPr>
-          <p:cNvPr id="16" name="사진 자리"/>
+          <p:cNvPr id="7" name="사진 자리"/>
           <p:cNvSpPr/>
           <p:nvPr/>
         </p:nvSpPr>
@@ -6449,7 +5102,7 @@
       </p:sp>
       <p:sp>
         <p:nvSpPr>
-          <p:cNvPr id="17" name="사진 자리"/>
+          <p:cNvPr id="8" name="사진 자리"/>
           <p:cNvSpPr/>
           <p:nvPr/>
         </p:nvSpPr>
@@ -6497,7 +5150,7 @@
       </p:sp>
       <p:sp>
         <p:nvSpPr>
-          <p:cNvPr id="18" name="사진 자리"/>
+          <p:cNvPr id="9" name="사진 자리"/>
           <p:cNvSpPr/>
           <p:nvPr/>
         </p:nvSpPr>
@@ -6545,7 +5198,7 @@
       </p:sp>
       <p:sp>
         <p:nvSpPr>
-          <p:cNvPr id="19" name="사진 자리"/>
+          <p:cNvPr id="10" name="사진 자리"/>
           <p:cNvSpPr/>
           <p:nvPr/>
         </p:nvSpPr>
@@ -6593,7 +5246,7 @@
       </p:sp>
       <p:sp>
         <p:nvSpPr>
-          <p:cNvPr id="20" name="사진 자리"/>
+          <p:cNvPr id="11" name="사진 자리"/>
           <p:cNvSpPr/>
           <p:nvPr/>
         </p:nvSpPr>
@@ -6641,7 +5294,7 @@
       </p:sp>
       <p:sp>
         <p:nvSpPr>
-          <p:cNvPr id="21" name="사진 자리"/>
+          <p:cNvPr id="12" name="사진 자리"/>
           <p:cNvSpPr/>
           <p:nvPr/>
         </p:nvSpPr>
@@ -6698,14 +5351,6 @@
 <file path=ppt/slides/slide6.xml><?xml version="1.0" encoding="utf-8"?>
 <p:sld xmlns:a="http://schemas.openxmlformats.org/drawingml/2006/main" xmlns:p="http://schemas.openxmlformats.org/presentationml/2006/main" xmlns:r="http://schemas.openxmlformats.org/officeDocument/2006/relationships">
   <p:cSld>
-    <p:bg>
-      <p:bgPr>
-        <a:solidFill>
-          <a:srgbClr val="FFFFFF"/>
-        </a:solidFill>
-        <a:effectLst/>
-      </p:bgPr>
-    </p:bg>
     <p:spTree>
       <p:nvGrpSpPr>
         <p:cNvPr id="1" name=""/>
@@ -6713,325 +5358,30 @@
         <p:nvPr/>
       </p:nvGrpSpPr>
       <p:grpSpPr/>
-      <p:sp>
-        <p:nvSpPr>
-          <p:cNvPr id="3" name="장식"/>
-          <p:cNvSpPr/>
+      <p:pic>
+        <p:nvPicPr>
+          <p:cNvPr id="3" name="표지 그림" descr="birthday-43.jpg"/>
+          <p:cNvPicPr>
+            <a:picLocks noChangeAspect="1"/>
+          </p:cNvPicPr>
           <p:nvPr/>
-        </p:nvSpPr>
-        <p:spPr>
-          <a:xfrm>
-            <a:off x="-274320" y="4251960"/>
-            <a:ext cx="12740335" cy="2743200"/>
-          </a:xfrm>
-          <a:prstGeom prst="wave">
-            <a:avLst/>
-          </a:prstGeom>
-          <a:solidFill>
-            <a:srgbClr val="F0D1D6"/>
-          </a:solidFill>
-          <a:ln>
-            <a:noFill/>
-          </a:ln>
-        </p:spPr>
-        <p:txBody>
-          <a:bodyPr rtlCol="0" anchor="ctr"/>
-          <a:lstStyle/>
-          <a:p>
-            <a:pPr algn="ctr"/>
-          </a:p>
-        </p:txBody>
-      </p:sp>
-      <p:sp>
-        <p:nvSpPr>
-          <p:cNvPr id="4" name="장식"/>
-          <p:cNvSpPr/>
-          <p:nvPr/>
-        </p:nvSpPr>
-        <p:spPr>
-          <a:xfrm>
-            <a:off x="-274320" y="5074920"/>
-            <a:ext cx="12740335" cy="2331720"/>
-          </a:xfrm>
-          <a:prstGeom prst="wave">
-            <a:avLst/>
-          </a:prstGeom>
-          <a:solidFill>
-            <a:srgbClr val="8D3443"/>
-          </a:solidFill>
-          <a:ln>
-            <a:noFill/>
-          </a:ln>
-        </p:spPr>
-        <p:txBody>
-          <a:bodyPr rtlCol="0" anchor="ctr"/>
-          <a:lstStyle/>
-          <a:p>
-            <a:pPr algn="ctr"/>
-          </a:p>
-        </p:txBody>
-      </p:sp>
-      <p:sp>
-        <p:nvSpPr>
-          <p:cNvPr id="5" name="장식"/>
-          <p:cNvSpPr/>
-          <p:nvPr/>
-        </p:nvSpPr>
-        <p:spPr>
-          <a:xfrm>
-            <a:off x="8543294" y="1234440"/>
-            <a:ext cx="822959" cy="1371600"/>
-          </a:xfrm>
-          <a:prstGeom prst="roundRect">
-            <a:avLst/>
-          </a:prstGeom>
-          <a:solidFill>
-            <a:srgbClr val="8D3443"/>
-          </a:solidFill>
-          <a:ln>
-            <a:noFill/>
-          </a:ln>
-        </p:spPr>
-        <p:txBody>
-          <a:bodyPr rtlCol="0" anchor="ctr"/>
-          <a:lstStyle/>
-          <a:p>
-            <a:pPr algn="ctr"/>
-          </a:p>
-        </p:txBody>
-      </p:sp>
-      <p:sp>
-        <p:nvSpPr>
-          <p:cNvPr id="6" name="장식"/>
-          <p:cNvSpPr/>
-          <p:nvPr/>
-        </p:nvSpPr>
-        <p:spPr>
-          <a:xfrm>
-            <a:off x="8749034" y="1097280"/>
-            <a:ext cx="411479" cy="137160"/>
+        </p:nvPicPr>
+        <p:blipFill>
+          <a:blip r:embed="rId2"/>
+          <a:stretch>
+            <a:fillRect/>
+          </a:stretch>
+        </p:blipFill>
+        <p:spPr>
+          <a:xfrm>
+            <a:off x="0" y="0"/>
+            <a:ext cx="12191695" cy="6858000"/>
           </a:xfrm>
           <a:prstGeom prst="rect">
             <a:avLst/>
           </a:prstGeom>
-          <a:solidFill>
-            <a:srgbClr val="3B9158"/>
-          </a:solidFill>
-          <a:ln>
-            <a:noFill/>
-          </a:ln>
-        </p:spPr>
-        <p:txBody>
-          <a:bodyPr rtlCol="0" anchor="ctr"/>
-          <a:lstStyle/>
-          <a:p>
-            <a:pPr algn="ctr"/>
-          </a:p>
-        </p:txBody>
-      </p:sp>
-      <p:sp>
-        <p:nvSpPr>
-          <p:cNvPr id="7" name="장식"/>
-          <p:cNvSpPr/>
-          <p:nvPr/>
-        </p:nvSpPr>
-        <p:spPr>
-          <a:xfrm>
-            <a:off x="8749034" y="2606040"/>
-            <a:ext cx="411479" cy="137160"/>
-          </a:xfrm>
-          <a:prstGeom prst="rect">
-            <a:avLst/>
-          </a:prstGeom>
-          <a:solidFill>
-            <a:srgbClr val="3B9158"/>
-          </a:solidFill>
-          <a:ln>
-            <a:noFill/>
-          </a:ln>
-        </p:spPr>
-        <p:txBody>
-          <a:bodyPr rtlCol="0" anchor="ctr"/>
-          <a:lstStyle/>
-          <a:p>
-            <a:pPr algn="ctr"/>
-          </a:p>
-        </p:txBody>
-      </p:sp>
-      <p:sp>
-        <p:nvSpPr>
-          <p:cNvPr id="8" name="장식"/>
-          <p:cNvSpPr/>
-          <p:nvPr/>
-        </p:nvSpPr>
-        <p:spPr>
-          <a:xfrm>
-            <a:off x="9585710" y="1728216"/>
-            <a:ext cx="822959" cy="1152144"/>
-          </a:xfrm>
-          <a:prstGeom prst="roundRect">
-            <a:avLst/>
-          </a:prstGeom>
-          <a:solidFill>
-            <a:srgbClr val="F0D1D6"/>
-          </a:solidFill>
-          <a:ln>
-            <a:noFill/>
-          </a:ln>
-        </p:spPr>
-        <p:txBody>
-          <a:bodyPr rtlCol="0" anchor="ctr"/>
-          <a:lstStyle/>
-          <a:p>
-            <a:pPr algn="ctr"/>
-          </a:p>
-        </p:txBody>
-      </p:sp>
-      <p:sp>
-        <p:nvSpPr>
-          <p:cNvPr id="9" name="장식"/>
-          <p:cNvSpPr/>
-          <p:nvPr/>
-        </p:nvSpPr>
-        <p:spPr>
-          <a:xfrm>
-            <a:off x="9791450" y="1591056"/>
-            <a:ext cx="411479" cy="137160"/>
-          </a:xfrm>
-          <a:prstGeom prst="rect">
-            <a:avLst/>
-          </a:prstGeom>
-          <a:solidFill>
-            <a:srgbClr val="3B9158"/>
-          </a:solidFill>
-          <a:ln>
-            <a:noFill/>
-          </a:ln>
-        </p:spPr>
-        <p:txBody>
-          <a:bodyPr rtlCol="0" anchor="ctr"/>
-          <a:lstStyle/>
-          <a:p>
-            <a:pPr algn="ctr"/>
-          </a:p>
-        </p:txBody>
-      </p:sp>
-      <p:sp>
-        <p:nvSpPr>
-          <p:cNvPr id="10" name="장식"/>
-          <p:cNvSpPr/>
-          <p:nvPr/>
-        </p:nvSpPr>
-        <p:spPr>
-          <a:xfrm>
-            <a:off x="9791450" y="2880360"/>
-            <a:ext cx="411479" cy="137160"/>
-          </a:xfrm>
-          <a:prstGeom prst="rect">
-            <a:avLst/>
-          </a:prstGeom>
-          <a:solidFill>
-            <a:srgbClr val="3B9158"/>
-          </a:solidFill>
-          <a:ln>
-            <a:noFill/>
-          </a:ln>
-        </p:spPr>
-        <p:txBody>
-          <a:bodyPr rtlCol="0" anchor="ctr"/>
-          <a:lstStyle/>
-          <a:p>
-            <a:pPr algn="ctr"/>
-          </a:p>
-        </p:txBody>
-      </p:sp>
-      <p:sp>
-        <p:nvSpPr>
-          <p:cNvPr id="11" name="장식"/>
-          <p:cNvSpPr/>
-          <p:nvPr/>
-        </p:nvSpPr>
-        <p:spPr>
-          <a:xfrm>
-            <a:off x="10628126" y="1234440"/>
-            <a:ext cx="822959" cy="1371600"/>
-          </a:xfrm>
-          <a:prstGeom prst="roundRect">
-            <a:avLst/>
-          </a:prstGeom>
-          <a:solidFill>
-            <a:srgbClr val="3B9158"/>
-          </a:solidFill>
-          <a:ln>
-            <a:noFill/>
-          </a:ln>
-        </p:spPr>
-        <p:txBody>
-          <a:bodyPr rtlCol="0" anchor="ctr"/>
-          <a:lstStyle/>
-          <a:p>
-            <a:pPr algn="ctr"/>
-          </a:p>
-        </p:txBody>
-      </p:sp>
-      <p:sp>
-        <p:nvSpPr>
-          <p:cNvPr id="12" name="장식"/>
-          <p:cNvSpPr/>
-          <p:nvPr/>
-        </p:nvSpPr>
-        <p:spPr>
-          <a:xfrm>
-            <a:off x="10833866" y="1097280"/>
-            <a:ext cx="411479" cy="137160"/>
-          </a:xfrm>
-          <a:prstGeom prst="rect">
-            <a:avLst/>
-          </a:prstGeom>
-          <a:solidFill>
-            <a:srgbClr val="8D3443"/>
-          </a:solidFill>
-          <a:ln>
-            <a:noFill/>
-          </a:ln>
-        </p:spPr>
-        <p:txBody>
-          <a:bodyPr rtlCol="0" anchor="ctr"/>
-          <a:lstStyle/>
-          <a:p>
-            <a:pPr algn="ctr"/>
-          </a:p>
-        </p:txBody>
-      </p:sp>
-      <p:sp>
-        <p:nvSpPr>
-          <p:cNvPr id="13" name="장식"/>
-          <p:cNvSpPr/>
-          <p:nvPr/>
-        </p:nvSpPr>
-        <p:spPr>
-          <a:xfrm>
-            <a:off x="10833866" y="2606040"/>
-            <a:ext cx="411479" cy="137160"/>
-          </a:xfrm>
-          <a:prstGeom prst="rect">
-            <a:avLst/>
-          </a:prstGeom>
-          <a:solidFill>
-            <a:srgbClr val="8D3443"/>
-          </a:solidFill>
-          <a:ln>
-            <a:noFill/>
-          </a:ln>
-        </p:spPr>
-        <p:txBody>
-          <a:bodyPr rtlCol="0" anchor="ctr"/>
-          <a:lstStyle/>
-          <a:p>
-            <a:pPr algn="ctr"/>
-          </a:p>
-        </p:txBody>
-      </p:sp>
+        </p:spPr>
+      </p:pic>
       <p:sp>
         <p:nvSpPr>
           <p:cNvPr id="2" name="Title 1"/>
@@ -7044,8 +5394,8 @@
         </p:nvSpPr>
         <p:spPr>
           <a:xfrm>
-            <a:off x="975335" y="1371600"/>
-            <a:ext cx="7558851" cy="1463040"/>
+            <a:off x="853418" y="2057400"/>
+            <a:ext cx="6095847" cy="1554480"/>
           </a:xfrm>
         </p:spPr>
         <p:txBody>
@@ -7065,21 +5415,21 @@
                   <a:srgbClr val="431920"/>
                 </a:solidFill>
               </a:rPr>
-              <a:t>함께해 주셔서 감사합니다</a:t>
-            </a:r>
-          </a:p>
-        </p:txBody>
-      </p:sp>
-      <p:sp>
-        <p:nvSpPr>
-          <p:cNvPr id="14" name="한 줄 문구"/>
+              <a:t>와 주셔서 고맙습니다</a:t>
+            </a:r>
+          </a:p>
+        </p:txBody>
+      </p:sp>
+      <p:sp>
+        <p:nvSpPr>
+          <p:cNvPr id="4" name="한 줄 문구"/>
           <p:cNvSpPr txBox="1"/>
           <p:nvPr/>
         </p:nvSpPr>
         <p:spPr>
           <a:xfrm>
-            <a:off x="975335" y="2926080"/>
-            <a:ext cx="7315017" cy="822960"/>
+            <a:off x="853418" y="3749039"/>
+            <a:ext cx="6095847" cy="822960"/>
           </a:xfrm>
           <a:prstGeom prst="rect">
             <a:avLst/>
@@ -7103,21 +5453,21 @@
                   <a:srgbClr val="431920"/>
                 </a:solidFill>
               </a:rPr>
-              <a:t>첫 번째 생일을 축하해 주셔서 고맙습니다</a:t>
-            </a:r>
-          </a:p>
-        </p:txBody>
-      </p:sp>
-      <p:sp>
-        <p:nvSpPr>
-          <p:cNvPr id="15" name="안내 문구"/>
+              <a:t>아이가 한 살이 되었습니다</a:t>
+            </a:r>
+          </a:p>
+        </p:txBody>
+      </p:sp>
+      <p:sp>
+        <p:nvSpPr>
+          <p:cNvPr id="5" name="안내 문구"/>
           <p:cNvSpPr txBox="1"/>
           <p:nvPr/>
         </p:nvSpPr>
         <p:spPr>
           <a:xfrm>
-            <a:off x="975335" y="3794760"/>
-            <a:ext cx="7315017" cy="914400"/>
+            <a:off x="853418" y="4617720"/>
+            <a:ext cx="6095847" cy="914400"/>
           </a:xfrm>
           <a:prstGeom prst="rect">
             <a:avLst/>

--- a/public/fun/pack/pptx/birthday/돌잔치_43_사진중심_설날세배.pptx
+++ b/public/fun/pack/pptx/birthday/돌잔치_43_사진중심_설날세배.pptx
@@ -3286,6 +3286,14 @@
 <file path=ppt/slides/slide1.xml><?xml version="1.0" encoding="utf-8"?>
 <p:sld xmlns:a="http://schemas.openxmlformats.org/drawingml/2006/main" xmlns:p="http://schemas.openxmlformats.org/presentationml/2006/main" xmlns:r="http://schemas.openxmlformats.org/officeDocument/2006/relationships">
   <p:cSld>
+    <p:bg>
+      <p:bgPr>
+        <a:solidFill>
+          <a:srgbClr val="F6D5DA"/>
+        </a:solidFill>
+        <a:effectLst/>
+      </p:bgPr>
+    </p:bg>
     <p:spTree>
       <p:nvGrpSpPr>
         <p:cNvPr id="1" name=""/>
@@ -3293,30 +3301,119 @@
         <p:nvPr/>
       </p:nvGrpSpPr>
       <p:grpSpPr/>
-      <p:pic>
-        <p:nvPicPr>
-          <p:cNvPr id="3" name="표지 그림" descr="birthday-43.jpg"/>
-          <p:cNvPicPr>
-            <a:picLocks noChangeAspect="1"/>
-          </p:cNvPicPr>
+      <p:sp>
+        <p:nvSpPr>
+          <p:cNvPr id="3" name="사진 자리"/>
+          <p:cNvSpPr/>
           <p:nvPr/>
-        </p:nvPicPr>
-        <p:blipFill>
-          <a:blip r:embed="rId2"/>
-          <a:stretch>
-            <a:fillRect/>
-          </a:stretch>
-        </p:blipFill>
-        <p:spPr>
-          <a:xfrm>
-            <a:off x="0" y="0"/>
-            <a:ext cx="12191695" cy="6858000"/>
+        </p:nvSpPr>
+        <p:spPr>
+          <a:xfrm>
+            <a:off x="7558851" y="685800"/>
+            <a:ext cx="3169840" cy="5486400"/>
+          </a:xfrm>
+          <a:prstGeom prst="round2SameRect">
+            <a:avLst>
+              <a:gd name="adj1" fmla="val 50000"/>
+              <a:gd name="adj2" fmla="val 0"/>
+            </a:avLst>
+          </a:prstGeom>
+          <a:solidFill>
+            <a:srgbClr val="EBADB8"/>
+          </a:solidFill>
+          <a:ln>
+            <a:noFill/>
+          </a:ln>
+        </p:spPr>
+        <p:txBody>
+          <a:bodyPr rtlCol="0" anchor="ctr" wrap="square" lIns="54864" rIns="54864" tIns="27432" bIns="27432">
+            <a:noAutofit/>
+          </a:bodyPr>
+          <a:lstStyle/>
+          <a:p>
+            <a:pPr algn="ctr">
+              <a:lnSpc>
+                <a:spcPct val="100000"/>
+              </a:lnSpc>
+            </a:pPr>
+            <a:r>
+              <a:rPr sz="1400" b="0" i="0">
+                <a:solidFill>
+                  <a:srgbClr val="49272D"/>
+                </a:solidFill>
+              </a:rPr>
+              <a:t>사진을 넣어 주세요</a:t>
+            </a:r>
+          </a:p>
+        </p:txBody>
+      </p:sp>
+      <p:sp>
+        <p:nvSpPr>
+          <p:cNvPr id="4" name="장식"/>
+          <p:cNvSpPr/>
+          <p:nvPr/>
+        </p:nvSpPr>
+        <p:spPr>
+          <a:xfrm>
+            <a:off x="6827349" y="4251960"/>
+            <a:ext cx="1005840" cy="1005840"/>
+          </a:xfrm>
+          <a:prstGeom prst="ellipse">
+            <a:avLst/>
+          </a:prstGeom>
+          <a:solidFill>
+            <a:srgbClr val="EBADB8"/>
+          </a:solidFill>
+          <a:ln>
+            <a:noFill/>
+          </a:ln>
+        </p:spPr>
+        <p:txBody>
+          <a:bodyPr rtlCol="0" anchor="ctr"/>
+          <a:lstStyle/>
+          <a:p>
+            <a:pPr algn="ctr"/>
+          </a:p>
+        </p:txBody>
+      </p:sp>
+      <p:sp>
+        <p:nvSpPr>
+          <p:cNvPr id="5" name="라벨"/>
+          <p:cNvSpPr txBox="1"/>
+          <p:nvPr/>
+        </p:nvSpPr>
+        <p:spPr>
+          <a:xfrm>
+            <a:off x="822960" y="2148840"/>
+            <a:ext cx="5608179" cy="274320"/>
           </a:xfrm>
           <a:prstGeom prst="rect">
             <a:avLst/>
           </a:prstGeom>
-        </p:spPr>
-      </p:pic>
+          <a:noFill/>
+        </p:spPr>
+        <p:txBody>
+          <a:bodyPr wrap="square" lIns="54864" rIns="54864" tIns="27432" bIns="27432" anchor="t">
+            <a:noAutofit/>
+          </a:bodyPr>
+          <a:lstStyle/>
+          <a:p>
+            <a:pPr algn="l">
+              <a:lnSpc>
+                <a:spcPct val="115000"/>
+              </a:lnSpc>
+            </a:pPr>
+            <a:r>
+              <a:rPr sz="1000" b="1" i="0" spc="250">
+                <a:solidFill>
+                  <a:srgbClr val="26231F"/>
+                </a:solidFill>
+              </a:rPr>
+              <a:t>FIRST BIRTHDAY</a:t>
+            </a:r>
+          </a:p>
+        </p:txBody>
+      </p:sp>
       <p:sp>
         <p:nvSpPr>
           <p:cNvPr id="2" name="Title 1"/>
@@ -3329,8 +3426,8 @@
         </p:nvSpPr>
         <p:spPr>
           <a:xfrm>
-            <a:off x="853418" y="2057400"/>
-            <a:ext cx="6095847" cy="1554480"/>
+            <a:off x="822960" y="2606040"/>
+            <a:ext cx="5608179" cy="1188720"/>
           </a:xfrm>
         </p:spPr>
         <p:txBody>
@@ -3347,7 +3444,7 @@
             <a:r>
               <a:rPr sz="4000" b="1" i="0">
                 <a:solidFill>
-                  <a:srgbClr val="431920"/>
+                  <a:srgbClr val="26231F"/>
                 </a:solidFill>
               </a:rPr>
               <a:t>첫 번째 생일</a:t>
@@ -3357,14 +3454,14 @@
       </p:sp>
       <p:sp>
         <p:nvSpPr>
-          <p:cNvPr id="4" name="한 줄 문구"/>
+          <p:cNvPr id="6" name="한 줄 문구"/>
           <p:cNvSpPr txBox="1"/>
           <p:nvPr/>
         </p:nvSpPr>
         <p:spPr>
           <a:xfrm>
-            <a:off x="853418" y="3749039"/>
-            <a:ext cx="6095847" cy="822960"/>
+            <a:off x="822960" y="3886200"/>
+            <a:ext cx="5608179" cy="822960"/>
           </a:xfrm>
           <a:prstGeom prst="rect">
             <a:avLst/>
@@ -3383,26 +3480,26 @@
               </a:lnSpc>
             </a:pPr>
             <a:r>
-              <a:rPr sz="1700" b="0" i="1">
+              <a:rPr sz="1700" b="0" i="0">
                 <a:solidFill>
-                  <a:srgbClr val="431920"/>
+                  <a:srgbClr val="26231F"/>
                 </a:solidFill>
               </a:rPr>
-              <a:t>눈 오던 날 찍은 사진이 마음에 듭니다</a:t>
-            </a:r>
-          </a:p>
-        </p:txBody>
-      </p:sp>
-      <p:sp>
-        <p:nvSpPr>
-          <p:cNvPr id="5" name="안내 문구"/>
+              <a:t>마음에 쏙 드는 사진을 골랐습니다</a:t>
+            </a:r>
+          </a:p>
+        </p:txBody>
+      </p:sp>
+      <p:sp>
+        <p:nvSpPr>
+          <p:cNvPr id="7" name="안내 문구"/>
           <p:cNvSpPr txBox="1"/>
           <p:nvPr/>
         </p:nvSpPr>
         <p:spPr>
           <a:xfrm>
-            <a:off x="853418" y="4617720"/>
-            <a:ext cx="6095847" cy="914400"/>
+            <a:off x="822960" y="4754880"/>
+            <a:ext cx="5608179" cy="914400"/>
           </a:xfrm>
           <a:prstGeom prst="rect">
             <a:avLst/>
@@ -3423,10 +3520,10 @@
             <a:r>
               <a:rPr sz="1400" b="0" i="0">
                 <a:solidFill>
-                  <a:srgbClr val="666666"/>
+                  <a:srgbClr val="26231F"/>
                 </a:solidFill>
               </a:rPr>
-              <a:t>아기 이름 · 2027. 00. 00</a:t>
+              <a:t>아기 이름 · 날짜 입력</a:t>
             </a:r>
           </a:p>
           <a:p>
@@ -3438,7 +3535,7 @@
             <a:r>
               <a:rPr sz="1400" b="0" i="0">
                 <a:solidFill>
-                  <a:srgbClr val="666666"/>
+                  <a:srgbClr val="26231F"/>
                 </a:solidFill>
               </a:rPr>
               <a:t>장소를 입력하세요</a:t>
@@ -3480,14 +3577,14 @@
         </p:nvSpPr>
         <p:spPr>
           <a:xfrm>
-            <a:off x="-182880" y="6144768"/>
-            <a:ext cx="12557455" cy="731520"/>
-          </a:xfrm>
-          <a:prstGeom prst="wave">
+            <a:off x="0" y="6565392"/>
+            <a:ext cx="12191695" cy="292608"/>
+          </a:xfrm>
+          <a:prstGeom prst="rect">
             <a:avLst/>
           </a:prstGeom>
           <a:solidFill>
-            <a:srgbClr val="F0D1D6"/>
+            <a:srgbClr val="EBADB8"/>
           </a:solidFill>
           <a:ln>
             <a:noFill/>
@@ -3509,14 +3606,14 @@
         </p:nvSpPr>
         <p:spPr>
           <a:xfrm>
-            <a:off x="-182880" y="6400800"/>
-            <a:ext cx="12557455" cy="502920"/>
-          </a:xfrm>
-          <a:prstGeom prst="wave">
+            <a:off x="640080" y="566928"/>
+            <a:ext cx="10911535" cy="10972"/>
+          </a:xfrm>
+          <a:prstGeom prst="rect">
             <a:avLst/>
           </a:prstGeom>
           <a:solidFill>
-            <a:srgbClr val="8D3443"/>
+            <a:srgbClr val="26231F"/>
           </a:solidFill>
           <a:ln>
             <a:noFill/>
@@ -3532,6 +3629,73 @@
       </p:sp>
       <p:sp>
         <p:nvSpPr>
+          <p:cNvPr id="5" name="상단 라벨"/>
+          <p:cNvSpPr txBox="1"/>
+          <p:nvPr/>
+        </p:nvSpPr>
+        <p:spPr>
+          <a:xfrm>
+            <a:off x="640080" y="237744"/>
+            <a:ext cx="5486400" cy="274320"/>
+          </a:xfrm>
+          <a:prstGeom prst="rect">
+            <a:avLst/>
+          </a:prstGeom>
+          <a:noFill/>
+        </p:spPr>
+        <p:txBody>
+          <a:bodyPr wrap="square" lIns="54864" rIns="54864" tIns="27432" bIns="27432" anchor="ctr">
+            <a:noAutofit/>
+          </a:bodyPr>
+          <a:lstStyle/>
+          <a:p>
+            <a:pPr algn="l">
+              <a:lnSpc>
+                <a:spcPct val="115000"/>
+              </a:lnSpc>
+            </a:pPr>
+            <a:r>
+              <a:rPr sz="900" b="1" i="0" spc="250">
+                <a:solidFill>
+                  <a:srgbClr val="26231F"/>
+                </a:solidFill>
+              </a:rPr>
+              <a:t>FIRST BIRTHDAY</a:t>
+            </a:r>
+          </a:p>
+        </p:txBody>
+      </p:sp>
+      <p:sp>
+        <p:nvSpPr>
+          <p:cNvPr id="6" name="포인트"/>
+          <p:cNvSpPr/>
+          <p:nvPr/>
+        </p:nvSpPr>
+        <p:spPr>
+          <a:xfrm>
+            <a:off x="11204143" y="246888"/>
+            <a:ext cx="237744" cy="237744"/>
+          </a:xfrm>
+          <a:prstGeom prst="star4">
+            <a:avLst/>
+          </a:prstGeom>
+          <a:solidFill>
+            <a:srgbClr val="E198A4"/>
+          </a:solidFill>
+          <a:ln>
+            <a:noFill/>
+          </a:ln>
+        </p:spPr>
+        <p:txBody>
+          <a:bodyPr rtlCol="0" anchor="ctr"/>
+          <a:lstStyle/>
+          <a:p>
+            <a:pPr algn="ctr"/>
+          </a:p>
+        </p:txBody>
+      </p:sp>
+      <p:sp>
+        <p:nvSpPr>
           <p:cNvPr id="2" name="Title 1"/>
           <p:cNvSpPr>
             <a:spLocks noGrp="1"/>
@@ -3542,8 +3706,8 @@
         </p:nvSpPr>
         <p:spPr>
           <a:xfrm>
-            <a:off x="640080" y="457200"/>
-            <a:ext cx="9722815" cy="868680"/>
+            <a:off x="640080" y="731520"/>
+            <a:ext cx="10911535" cy="822960"/>
           </a:xfrm>
         </p:spPr>
         <p:txBody>
@@ -3560,7 +3724,7 @@
             <a:r>
               <a:rPr sz="3000" b="1" i="0">
                 <a:solidFill>
-                  <a:srgbClr val="431920"/>
+                  <a:srgbClr val="26231F"/>
                 </a:solidFill>
               </a:rPr>
               <a:t>우리 아기를 소개합니다</a:t>
@@ -3570,13 +3734,13 @@
       </p:sp>
       <p:sp>
         <p:nvSpPr>
-          <p:cNvPr id="5" name="사진 자리"/>
+          <p:cNvPr id="7" name="사진 자리"/>
           <p:cNvSpPr/>
           <p:nvPr/>
         </p:nvSpPr>
         <p:spPr>
           <a:xfrm>
-            <a:off x="640080" y="1554480"/>
+            <a:off x="640080" y="1783080"/>
             <a:ext cx="3840480" cy="4206240"/>
           </a:xfrm>
           <a:prstGeom prst="roundRect">
@@ -3585,12 +3749,10 @@
             </a:avLst>
           </a:prstGeom>
           <a:solidFill>
-            <a:srgbClr val="F0D1D6"/>
+            <a:srgbClr val="F6D5DA"/>
           </a:solidFill>
           <a:ln w="19050">
-            <a:solidFill>
-              <a:srgbClr val="8D3443"/>
-            </a:solidFill>
+            <a:noFill/>
             <a:prstDash val="dash"/>
           </a:ln>
         </p:spPr>
@@ -3608,7 +3770,7 @@
             <a:r>
               <a:rPr sz="1400" b="0" i="0">
                 <a:solidFill>
-                  <a:srgbClr val="431920"/>
+                  <a:srgbClr val="8E8780"/>
                 </a:solidFill>
               </a:rPr>
               <a:t>아기 사진을 넣어 주세요</a:t>
@@ -3618,14 +3780,14 @@
       </p:sp>
       <p:graphicFrame>
         <p:nvGraphicFramePr>
-          <p:cNvPr id="6" name="표"/>
+          <p:cNvPr id="8" name="표"/>
           <p:cNvGraphicFramePr>
             <a:graphicFrameLocks noGrp="1"/>
           </p:cNvGraphicFramePr>
           <p:nvPr/>
         </p:nvGraphicFramePr>
         <p:xfrm>
-          <a:off x="4846320" y="1554480"/>
+          <a:off x="4846320" y="1783080"/>
           <a:ext cx="6705295" cy="3950208"/>
         </p:xfrm>
         <a:graphic>
@@ -3648,7 +3810,7 @@
                       <a:r>
                         <a:rPr sz="1500" b="1">
                           <a:solidFill>
-                            <a:srgbClr val="431920"/>
+                            <a:srgbClr val="49272D"/>
                           </a:solidFill>
                         </a:rPr>
                         <a:t>이름</a:t>
@@ -3658,30 +3820,30 @@
                   <a:tcPr anchor="ctr" marL="73152" marR="73152">
                     <a:lnL w="9525" cap="flat" cmpd="sng" algn="ctr">
                       <a:solidFill>
-                        <a:srgbClr val="F0D1D6"/>
+                        <a:srgbClr val="F6D5DA"/>
                       </a:solidFill>
                       <a:prstDash val="solid"/>
                     </a:lnL>
                     <a:lnR w="9525" cap="flat" cmpd="sng" algn="ctr">
                       <a:solidFill>
-                        <a:srgbClr val="F0D1D6"/>
+                        <a:srgbClr val="F6D5DA"/>
                       </a:solidFill>
                       <a:prstDash val="solid"/>
                     </a:lnR>
                     <a:lnT w="9525" cap="flat" cmpd="sng" algn="ctr">
                       <a:solidFill>
-                        <a:srgbClr val="F0D1D6"/>
+                        <a:srgbClr val="F6D5DA"/>
                       </a:solidFill>
                       <a:prstDash val="solid"/>
                     </a:lnT>
                     <a:lnB w="9525" cap="flat" cmpd="sng" algn="ctr">
                       <a:solidFill>
-                        <a:srgbClr val="F0D1D6"/>
+                        <a:srgbClr val="F6D5DA"/>
                       </a:solidFill>
                       <a:prstDash val="solid"/>
                     </a:lnB>
                     <a:solidFill>
-                      <a:srgbClr val="F0D1D6"/>
+                      <a:srgbClr val="F6D5DA"/>
                     </a:solidFill>
                   </a:tcPr>
                 </a:tc>
@@ -3694,7 +3856,7 @@
                       <a:r>
                         <a:rPr sz="1500" b="0">
                           <a:solidFill>
-                            <a:srgbClr val="2B2B2B"/>
+                            <a:srgbClr val="26231F"/>
                           </a:solidFill>
                         </a:rPr>
                         <a:t>입력하세요</a:t>
@@ -3704,30 +3866,30 @@
                   <a:tcPr anchor="ctr" marL="73152" marR="73152">
                     <a:lnL w="9525" cap="flat" cmpd="sng" algn="ctr">
                       <a:solidFill>
-                        <a:srgbClr val="F0D1D6"/>
+                        <a:srgbClr val="F6D5DA"/>
                       </a:solidFill>
                       <a:prstDash val="solid"/>
                     </a:lnL>
                     <a:lnR w="9525" cap="flat" cmpd="sng" algn="ctr">
                       <a:solidFill>
-                        <a:srgbClr val="F0D1D6"/>
+                        <a:srgbClr val="F6D5DA"/>
                       </a:solidFill>
                       <a:prstDash val="solid"/>
                     </a:lnR>
                     <a:lnT w="9525" cap="flat" cmpd="sng" algn="ctr">
                       <a:solidFill>
-                        <a:srgbClr val="F0D1D6"/>
+                        <a:srgbClr val="F6D5DA"/>
                       </a:solidFill>
                       <a:prstDash val="solid"/>
                     </a:lnT>
                     <a:lnB w="9525" cap="flat" cmpd="sng" algn="ctr">
                       <a:solidFill>
-                        <a:srgbClr val="F0D1D6"/>
+                        <a:srgbClr val="F6D5DA"/>
                       </a:solidFill>
                       <a:prstDash val="solid"/>
                     </a:lnB>
                     <a:solidFill>
-                      <a:srgbClr val="F9F0F2"/>
+                      <a:srgbClr val="FBECEF"/>
                     </a:solidFill>
                   </a:tcPr>
                 </a:tc>
@@ -3742,7 +3904,7 @@
                       <a:r>
                         <a:rPr sz="1500" b="1">
                           <a:solidFill>
-                            <a:srgbClr val="431920"/>
+                            <a:srgbClr val="49272D"/>
                           </a:solidFill>
                         </a:rPr>
                         <a:t>생일</a:t>
@@ -3752,30 +3914,30 @@
                   <a:tcPr anchor="ctr" marL="73152" marR="73152">
                     <a:lnL w="9525" cap="flat" cmpd="sng" algn="ctr">
                       <a:solidFill>
-                        <a:srgbClr val="F0D1D6"/>
+                        <a:srgbClr val="F6D5DA"/>
                       </a:solidFill>
                       <a:prstDash val="solid"/>
                     </a:lnL>
                     <a:lnR w="9525" cap="flat" cmpd="sng" algn="ctr">
                       <a:solidFill>
-                        <a:srgbClr val="F0D1D6"/>
+                        <a:srgbClr val="F6D5DA"/>
                       </a:solidFill>
                       <a:prstDash val="solid"/>
                     </a:lnR>
                     <a:lnT w="9525" cap="flat" cmpd="sng" algn="ctr">
                       <a:solidFill>
-                        <a:srgbClr val="F0D1D6"/>
+                        <a:srgbClr val="F6D5DA"/>
                       </a:solidFill>
                       <a:prstDash val="solid"/>
                     </a:lnT>
                     <a:lnB w="9525" cap="flat" cmpd="sng" algn="ctr">
                       <a:solidFill>
-                        <a:srgbClr val="F0D1D6"/>
+                        <a:srgbClr val="F6D5DA"/>
                       </a:solidFill>
                       <a:prstDash val="solid"/>
                     </a:lnB>
                     <a:solidFill>
-                      <a:srgbClr val="F0D1D6"/>
+                      <a:srgbClr val="F6D5DA"/>
                     </a:solidFill>
                   </a:tcPr>
                 </a:tc>
@@ -3788,7 +3950,7 @@
                       <a:r>
                         <a:rPr sz="1500" b="0">
                           <a:solidFill>
-                            <a:srgbClr val="2B2B2B"/>
+                            <a:srgbClr val="26231F"/>
                           </a:solidFill>
                         </a:rPr>
                         <a:t>입력하세요</a:t>
@@ -3798,25 +3960,25 @@
                   <a:tcPr anchor="ctr" marL="73152" marR="73152">
                     <a:lnL w="9525" cap="flat" cmpd="sng" algn="ctr">
                       <a:solidFill>
-                        <a:srgbClr val="F0D1D6"/>
+                        <a:srgbClr val="F6D5DA"/>
                       </a:solidFill>
                       <a:prstDash val="solid"/>
                     </a:lnL>
                     <a:lnR w="9525" cap="flat" cmpd="sng" algn="ctr">
                       <a:solidFill>
-                        <a:srgbClr val="F0D1D6"/>
+                        <a:srgbClr val="F6D5DA"/>
                       </a:solidFill>
                       <a:prstDash val="solid"/>
                     </a:lnR>
                     <a:lnT w="9525" cap="flat" cmpd="sng" algn="ctr">
                       <a:solidFill>
-                        <a:srgbClr val="F0D1D6"/>
+                        <a:srgbClr val="F6D5DA"/>
                       </a:solidFill>
                       <a:prstDash val="solid"/>
                     </a:lnT>
                     <a:lnB w="9525" cap="flat" cmpd="sng" algn="ctr">
                       <a:solidFill>
-                        <a:srgbClr val="F0D1D6"/>
+                        <a:srgbClr val="F6D5DA"/>
                       </a:solidFill>
                       <a:prstDash val="solid"/>
                     </a:lnB>
@@ -3836,7 +3998,7 @@
                       <a:r>
                         <a:rPr sz="1500" b="1">
                           <a:solidFill>
-                            <a:srgbClr val="431920"/>
+                            <a:srgbClr val="49272D"/>
                           </a:solidFill>
                         </a:rPr>
                         <a:t>키 · 몸무게</a:t>
@@ -3846,30 +4008,30 @@
                   <a:tcPr anchor="ctr" marL="73152" marR="73152">
                     <a:lnL w="9525" cap="flat" cmpd="sng" algn="ctr">
                       <a:solidFill>
-                        <a:srgbClr val="F0D1D6"/>
+                        <a:srgbClr val="F6D5DA"/>
                       </a:solidFill>
                       <a:prstDash val="solid"/>
                     </a:lnL>
                     <a:lnR w="9525" cap="flat" cmpd="sng" algn="ctr">
                       <a:solidFill>
-                        <a:srgbClr val="F0D1D6"/>
+                        <a:srgbClr val="F6D5DA"/>
                       </a:solidFill>
                       <a:prstDash val="solid"/>
                     </a:lnR>
                     <a:lnT w="9525" cap="flat" cmpd="sng" algn="ctr">
                       <a:solidFill>
-                        <a:srgbClr val="F0D1D6"/>
+                        <a:srgbClr val="F6D5DA"/>
                       </a:solidFill>
                       <a:prstDash val="solid"/>
                     </a:lnT>
                     <a:lnB w="9525" cap="flat" cmpd="sng" algn="ctr">
                       <a:solidFill>
-                        <a:srgbClr val="F0D1D6"/>
+                        <a:srgbClr val="F6D5DA"/>
                       </a:solidFill>
                       <a:prstDash val="solid"/>
                     </a:lnB>
                     <a:solidFill>
-                      <a:srgbClr val="F0D1D6"/>
+                      <a:srgbClr val="F6D5DA"/>
                     </a:solidFill>
                   </a:tcPr>
                 </a:tc>
@@ -3882,7 +4044,7 @@
                       <a:r>
                         <a:rPr sz="1500" b="0">
                           <a:solidFill>
-                            <a:srgbClr val="2B2B2B"/>
+                            <a:srgbClr val="26231F"/>
                           </a:solidFill>
                         </a:rPr>
                         <a:t>입력하세요</a:t>
@@ -3892,30 +4054,30 @@
                   <a:tcPr anchor="ctr" marL="73152" marR="73152">
                     <a:lnL w="9525" cap="flat" cmpd="sng" algn="ctr">
                       <a:solidFill>
-                        <a:srgbClr val="F0D1D6"/>
+                        <a:srgbClr val="F6D5DA"/>
                       </a:solidFill>
                       <a:prstDash val="solid"/>
                     </a:lnL>
                     <a:lnR w="9525" cap="flat" cmpd="sng" algn="ctr">
                       <a:solidFill>
-                        <a:srgbClr val="F0D1D6"/>
+                        <a:srgbClr val="F6D5DA"/>
                       </a:solidFill>
                       <a:prstDash val="solid"/>
                     </a:lnR>
                     <a:lnT w="9525" cap="flat" cmpd="sng" algn="ctr">
                       <a:solidFill>
-                        <a:srgbClr val="F0D1D6"/>
+                        <a:srgbClr val="F6D5DA"/>
                       </a:solidFill>
                       <a:prstDash val="solid"/>
                     </a:lnT>
                     <a:lnB w="9525" cap="flat" cmpd="sng" algn="ctr">
                       <a:solidFill>
-                        <a:srgbClr val="F0D1D6"/>
+                        <a:srgbClr val="F6D5DA"/>
                       </a:solidFill>
                       <a:prstDash val="solid"/>
                     </a:lnB>
                     <a:solidFill>
-                      <a:srgbClr val="F9F0F2"/>
+                      <a:srgbClr val="FBECEF"/>
                     </a:solidFill>
                   </a:tcPr>
                 </a:tc>
@@ -3930,7 +4092,7 @@
                       <a:r>
                         <a:rPr sz="1500" b="1">
                           <a:solidFill>
-                            <a:srgbClr val="431920"/>
+                            <a:srgbClr val="49272D"/>
                           </a:solidFill>
                         </a:rPr>
                         <a:t>좋아하는 것</a:t>
@@ -3940,30 +4102,30 @@
                   <a:tcPr anchor="ctr" marL="73152" marR="73152">
                     <a:lnL w="9525" cap="flat" cmpd="sng" algn="ctr">
                       <a:solidFill>
-                        <a:srgbClr val="F0D1D6"/>
+                        <a:srgbClr val="F6D5DA"/>
                       </a:solidFill>
                       <a:prstDash val="solid"/>
                     </a:lnL>
                     <a:lnR w="9525" cap="flat" cmpd="sng" algn="ctr">
                       <a:solidFill>
-                        <a:srgbClr val="F0D1D6"/>
+                        <a:srgbClr val="F6D5DA"/>
                       </a:solidFill>
                       <a:prstDash val="solid"/>
                     </a:lnR>
                     <a:lnT w="9525" cap="flat" cmpd="sng" algn="ctr">
                       <a:solidFill>
-                        <a:srgbClr val="F0D1D6"/>
+                        <a:srgbClr val="F6D5DA"/>
                       </a:solidFill>
                       <a:prstDash val="solid"/>
                     </a:lnT>
                     <a:lnB w="9525" cap="flat" cmpd="sng" algn="ctr">
                       <a:solidFill>
-                        <a:srgbClr val="F0D1D6"/>
+                        <a:srgbClr val="F6D5DA"/>
                       </a:solidFill>
                       <a:prstDash val="solid"/>
                     </a:lnB>
                     <a:solidFill>
-                      <a:srgbClr val="F0D1D6"/>
+                      <a:srgbClr val="F6D5DA"/>
                     </a:solidFill>
                   </a:tcPr>
                 </a:tc>
@@ -3976,7 +4138,7 @@
                       <a:r>
                         <a:rPr sz="1500" b="0">
                           <a:solidFill>
-                            <a:srgbClr val="2B2B2B"/>
+                            <a:srgbClr val="26231F"/>
                           </a:solidFill>
                         </a:rPr>
                         <a:t>입력하세요</a:t>
@@ -3986,25 +4148,25 @@
                   <a:tcPr anchor="ctr" marL="73152" marR="73152">
                     <a:lnL w="9525" cap="flat" cmpd="sng" algn="ctr">
                       <a:solidFill>
-                        <a:srgbClr val="F0D1D6"/>
+                        <a:srgbClr val="F6D5DA"/>
                       </a:solidFill>
                       <a:prstDash val="solid"/>
                     </a:lnL>
                     <a:lnR w="9525" cap="flat" cmpd="sng" algn="ctr">
                       <a:solidFill>
-                        <a:srgbClr val="F0D1D6"/>
+                        <a:srgbClr val="F6D5DA"/>
                       </a:solidFill>
                       <a:prstDash val="solid"/>
                     </a:lnR>
                     <a:lnT w="9525" cap="flat" cmpd="sng" algn="ctr">
                       <a:solidFill>
-                        <a:srgbClr val="F0D1D6"/>
+                        <a:srgbClr val="F6D5DA"/>
                       </a:solidFill>
                       <a:prstDash val="solid"/>
                     </a:lnT>
                     <a:lnB w="9525" cap="flat" cmpd="sng" algn="ctr">
                       <a:solidFill>
-                        <a:srgbClr val="F0D1D6"/>
+                        <a:srgbClr val="F6D5DA"/>
                       </a:solidFill>
                       <a:prstDash val="solid"/>
                     </a:lnB>
@@ -4024,7 +4186,7 @@
                       <a:r>
                         <a:rPr sz="1500" b="1">
                           <a:solidFill>
-                            <a:srgbClr val="431920"/>
+                            <a:srgbClr val="49272D"/>
                           </a:solidFill>
                         </a:rPr>
                         <a:t>별명</a:t>
@@ -4034,30 +4196,30 @@
                   <a:tcPr anchor="ctr" marL="73152" marR="73152">
                     <a:lnL w="9525" cap="flat" cmpd="sng" algn="ctr">
                       <a:solidFill>
-                        <a:srgbClr val="F0D1D6"/>
+                        <a:srgbClr val="F6D5DA"/>
                       </a:solidFill>
                       <a:prstDash val="solid"/>
                     </a:lnL>
                     <a:lnR w="9525" cap="flat" cmpd="sng" algn="ctr">
                       <a:solidFill>
-                        <a:srgbClr val="F0D1D6"/>
+                        <a:srgbClr val="F6D5DA"/>
                       </a:solidFill>
                       <a:prstDash val="solid"/>
                     </a:lnR>
                     <a:lnT w="9525" cap="flat" cmpd="sng" algn="ctr">
                       <a:solidFill>
-                        <a:srgbClr val="F0D1D6"/>
+                        <a:srgbClr val="F6D5DA"/>
                       </a:solidFill>
                       <a:prstDash val="solid"/>
                     </a:lnT>
                     <a:lnB w="9525" cap="flat" cmpd="sng" algn="ctr">
                       <a:solidFill>
-                        <a:srgbClr val="F0D1D6"/>
+                        <a:srgbClr val="F6D5DA"/>
                       </a:solidFill>
                       <a:prstDash val="solid"/>
                     </a:lnB>
                     <a:solidFill>
-                      <a:srgbClr val="F0D1D6"/>
+                      <a:srgbClr val="F6D5DA"/>
                     </a:solidFill>
                   </a:tcPr>
                 </a:tc>
@@ -4070,7 +4232,7 @@
                       <a:r>
                         <a:rPr sz="1500" b="0">
                           <a:solidFill>
-                            <a:srgbClr val="2B2B2B"/>
+                            <a:srgbClr val="26231F"/>
                           </a:solidFill>
                         </a:rPr>
                         <a:t>입력하세요</a:t>
@@ -4080,30 +4242,30 @@
                   <a:tcPr anchor="ctr" marL="73152" marR="73152">
                     <a:lnL w="9525" cap="flat" cmpd="sng" algn="ctr">
                       <a:solidFill>
-                        <a:srgbClr val="F0D1D6"/>
+                        <a:srgbClr val="F6D5DA"/>
                       </a:solidFill>
                       <a:prstDash val="solid"/>
                     </a:lnL>
                     <a:lnR w="9525" cap="flat" cmpd="sng" algn="ctr">
                       <a:solidFill>
-                        <a:srgbClr val="F0D1D6"/>
+                        <a:srgbClr val="F6D5DA"/>
                       </a:solidFill>
                       <a:prstDash val="solid"/>
                     </a:lnR>
                     <a:lnT w="9525" cap="flat" cmpd="sng" algn="ctr">
                       <a:solidFill>
-                        <a:srgbClr val="F0D1D6"/>
+                        <a:srgbClr val="F6D5DA"/>
                       </a:solidFill>
                       <a:prstDash val="solid"/>
                     </a:lnT>
                     <a:lnB w="9525" cap="flat" cmpd="sng" algn="ctr">
                       <a:solidFill>
-                        <a:srgbClr val="F0D1D6"/>
+                        <a:srgbClr val="F6D5DA"/>
                       </a:solidFill>
                       <a:prstDash val="solid"/>
                     </a:lnB>
                     <a:solidFill>
-                      <a:srgbClr val="F9F0F2"/>
+                      <a:srgbClr val="FBECEF"/>
                     </a:solidFill>
                   </a:tcPr>
                 </a:tc>
@@ -4118,7 +4280,7 @@
                       <a:r>
                         <a:rPr sz="1500" b="1">
                           <a:solidFill>
-                            <a:srgbClr val="431920"/>
+                            <a:srgbClr val="49272D"/>
                           </a:solidFill>
                         </a:rPr>
                         <a:t>부모의 마음</a:t>
@@ -4128,30 +4290,30 @@
                   <a:tcPr anchor="ctr" marL="73152" marR="73152">
                     <a:lnL w="9525" cap="flat" cmpd="sng" algn="ctr">
                       <a:solidFill>
-                        <a:srgbClr val="F0D1D6"/>
+                        <a:srgbClr val="F6D5DA"/>
                       </a:solidFill>
                       <a:prstDash val="solid"/>
                     </a:lnL>
                     <a:lnR w="9525" cap="flat" cmpd="sng" algn="ctr">
                       <a:solidFill>
-                        <a:srgbClr val="F0D1D6"/>
+                        <a:srgbClr val="F6D5DA"/>
                       </a:solidFill>
                       <a:prstDash val="solid"/>
                     </a:lnR>
                     <a:lnT w="9525" cap="flat" cmpd="sng" algn="ctr">
                       <a:solidFill>
-                        <a:srgbClr val="F0D1D6"/>
+                        <a:srgbClr val="F6D5DA"/>
                       </a:solidFill>
                       <a:prstDash val="solid"/>
                     </a:lnT>
                     <a:lnB w="9525" cap="flat" cmpd="sng" algn="ctr">
                       <a:solidFill>
-                        <a:srgbClr val="F0D1D6"/>
+                        <a:srgbClr val="F6D5DA"/>
                       </a:solidFill>
                       <a:prstDash val="solid"/>
                     </a:lnB>
                     <a:solidFill>
-                      <a:srgbClr val="F0D1D6"/>
+                      <a:srgbClr val="F6D5DA"/>
                     </a:solidFill>
                   </a:tcPr>
                 </a:tc>
@@ -4164,7 +4326,7 @@
                       <a:r>
                         <a:rPr sz="1500" b="0">
                           <a:solidFill>
-                            <a:srgbClr val="2B2B2B"/>
+                            <a:srgbClr val="26231F"/>
                           </a:solidFill>
                         </a:rPr>
                         <a:t>입력하세요</a:t>
@@ -4174,25 +4336,25 @@
                   <a:tcPr anchor="ctr" marL="73152" marR="73152">
                     <a:lnL w="9525" cap="flat" cmpd="sng" algn="ctr">
                       <a:solidFill>
-                        <a:srgbClr val="F0D1D6"/>
+                        <a:srgbClr val="F6D5DA"/>
                       </a:solidFill>
                       <a:prstDash val="solid"/>
                     </a:lnL>
                     <a:lnR w="9525" cap="flat" cmpd="sng" algn="ctr">
                       <a:solidFill>
-                        <a:srgbClr val="F0D1D6"/>
+                        <a:srgbClr val="F6D5DA"/>
                       </a:solidFill>
                       <a:prstDash val="solid"/>
                     </a:lnR>
                     <a:lnT w="9525" cap="flat" cmpd="sng" algn="ctr">
                       <a:solidFill>
-                        <a:srgbClr val="F0D1D6"/>
+                        <a:srgbClr val="F6D5DA"/>
                       </a:solidFill>
                       <a:prstDash val="solid"/>
                     </a:lnT>
                     <a:lnB w="9525" cap="flat" cmpd="sng" algn="ctr">
                       <a:solidFill>
-                        <a:srgbClr val="F0D1D6"/>
+                        <a:srgbClr val="F6D5DA"/>
                       </a:solidFill>
                       <a:prstDash val="solid"/>
                     </a:lnB>
@@ -4240,14 +4402,14 @@
         </p:nvSpPr>
         <p:spPr>
           <a:xfrm>
-            <a:off x="-182880" y="6144768"/>
-            <a:ext cx="12557455" cy="731520"/>
-          </a:xfrm>
-          <a:prstGeom prst="wave">
+            <a:off x="0" y="6565392"/>
+            <a:ext cx="12191695" cy="292608"/>
+          </a:xfrm>
+          <a:prstGeom prst="rect">
             <a:avLst/>
           </a:prstGeom>
           <a:solidFill>
-            <a:srgbClr val="F0D1D6"/>
+            <a:srgbClr val="EBADB8"/>
           </a:solidFill>
           <a:ln>
             <a:noFill/>
@@ -4269,14 +4431,14 @@
         </p:nvSpPr>
         <p:spPr>
           <a:xfrm>
-            <a:off x="-182880" y="6400800"/>
-            <a:ext cx="12557455" cy="502920"/>
-          </a:xfrm>
-          <a:prstGeom prst="wave">
+            <a:off x="640080" y="566928"/>
+            <a:ext cx="10911535" cy="10972"/>
+          </a:xfrm>
+          <a:prstGeom prst="rect">
             <a:avLst/>
           </a:prstGeom>
           <a:solidFill>
-            <a:srgbClr val="8D3443"/>
+            <a:srgbClr val="26231F"/>
           </a:solidFill>
           <a:ln>
             <a:noFill/>
@@ -4292,6 +4454,73 @@
       </p:sp>
       <p:sp>
         <p:nvSpPr>
+          <p:cNvPr id="5" name="상단 라벨"/>
+          <p:cNvSpPr txBox="1"/>
+          <p:nvPr/>
+        </p:nvSpPr>
+        <p:spPr>
+          <a:xfrm>
+            <a:off x="640080" y="237744"/>
+            <a:ext cx="5486400" cy="274320"/>
+          </a:xfrm>
+          <a:prstGeom prst="rect">
+            <a:avLst/>
+          </a:prstGeom>
+          <a:noFill/>
+        </p:spPr>
+        <p:txBody>
+          <a:bodyPr wrap="square" lIns="54864" rIns="54864" tIns="27432" bIns="27432" anchor="ctr">
+            <a:noAutofit/>
+          </a:bodyPr>
+          <a:lstStyle/>
+          <a:p>
+            <a:pPr algn="l">
+              <a:lnSpc>
+                <a:spcPct val="115000"/>
+              </a:lnSpc>
+            </a:pPr>
+            <a:r>
+              <a:rPr sz="900" b="1" i="0" spc="250">
+                <a:solidFill>
+                  <a:srgbClr val="26231F"/>
+                </a:solidFill>
+              </a:rPr>
+              <a:t>FIRST BIRTHDAY</a:t>
+            </a:r>
+          </a:p>
+        </p:txBody>
+      </p:sp>
+      <p:sp>
+        <p:nvSpPr>
+          <p:cNvPr id="6" name="포인트"/>
+          <p:cNvSpPr/>
+          <p:nvPr/>
+        </p:nvSpPr>
+        <p:spPr>
+          <a:xfrm>
+            <a:off x="11204143" y="246888"/>
+            <a:ext cx="237744" cy="237744"/>
+          </a:xfrm>
+          <a:prstGeom prst="star4">
+            <a:avLst/>
+          </a:prstGeom>
+          <a:solidFill>
+            <a:srgbClr val="E198A4"/>
+          </a:solidFill>
+          <a:ln>
+            <a:noFill/>
+          </a:ln>
+        </p:spPr>
+        <p:txBody>
+          <a:bodyPr rtlCol="0" anchor="ctr"/>
+          <a:lstStyle/>
+          <a:p>
+            <a:pPr algn="ctr"/>
+          </a:p>
+        </p:txBody>
+      </p:sp>
+      <p:sp>
+        <p:nvSpPr>
           <p:cNvPr id="2" name="Title 1"/>
           <p:cNvSpPr>
             <a:spLocks noGrp="1"/>
@@ -4302,8 +4531,8 @@
         </p:nvSpPr>
         <p:spPr>
           <a:xfrm>
-            <a:off x="640080" y="457200"/>
-            <a:ext cx="9722815" cy="868680"/>
+            <a:off x="640080" y="731520"/>
+            <a:ext cx="10911535" cy="822960"/>
           </a:xfrm>
         </p:spPr>
         <p:txBody>
@@ -4320,7 +4549,7 @@
             <a:r>
               <a:rPr sz="3000" b="1" i="0">
                 <a:solidFill>
-                  <a:srgbClr val="431920"/>
+                  <a:srgbClr val="26231F"/>
                 </a:solidFill>
               </a:rPr>
               <a:t>첫 번째 생일 사진</a:t>
@@ -4330,13 +4559,13 @@
       </p:sp>
       <p:sp>
         <p:nvSpPr>
-          <p:cNvPr id="5" name="사진 자리"/>
+          <p:cNvPr id="7" name="사진 자리"/>
           <p:cNvSpPr/>
           <p:nvPr/>
         </p:nvSpPr>
         <p:spPr>
           <a:xfrm>
-            <a:off x="640080" y="1554480"/>
+            <a:off x="640080" y="1783080"/>
             <a:ext cx="5318607" cy="4389120"/>
           </a:xfrm>
           <a:prstGeom prst="roundRect">
@@ -4345,12 +4574,10 @@
             </a:avLst>
           </a:prstGeom>
           <a:solidFill>
-            <a:srgbClr val="F0D1D6"/>
+            <a:srgbClr val="F6D5DA"/>
           </a:solidFill>
           <a:ln w="19050">
-            <a:solidFill>
-              <a:srgbClr val="8D3443"/>
-            </a:solidFill>
+            <a:noFill/>
             <a:prstDash val="dash"/>
           </a:ln>
         </p:spPr>
@@ -4368,7 +4595,7 @@
             <a:r>
               <a:rPr sz="1400" b="0" i="0">
                 <a:solidFill>
-                  <a:srgbClr val="431920"/>
+                  <a:srgbClr val="8E8780"/>
                 </a:solidFill>
               </a:rPr>
               <a:t>대표 사진 1</a:t>
@@ -4378,13 +4605,13 @@
       </p:sp>
       <p:sp>
         <p:nvSpPr>
-          <p:cNvPr id="6" name="사진 자리"/>
+          <p:cNvPr id="8" name="사진 자리"/>
           <p:cNvSpPr/>
           <p:nvPr/>
         </p:nvSpPr>
         <p:spPr>
           <a:xfrm>
-            <a:off x="6233007" y="1554480"/>
+            <a:off x="6233007" y="1783080"/>
             <a:ext cx="5318607" cy="4389120"/>
           </a:xfrm>
           <a:prstGeom prst="roundRect">
@@ -4393,12 +4620,10 @@
             </a:avLst>
           </a:prstGeom>
           <a:solidFill>
-            <a:srgbClr val="F0D1D6"/>
+            <a:srgbClr val="F6D5DA"/>
           </a:solidFill>
           <a:ln w="19050">
-            <a:solidFill>
-              <a:srgbClr val="8D3443"/>
-            </a:solidFill>
+            <a:noFill/>
             <a:prstDash val="dash"/>
           </a:ln>
         </p:spPr>
@@ -4416,7 +4641,7 @@
             <a:r>
               <a:rPr sz="1400" b="0" i="0">
                 <a:solidFill>
-                  <a:srgbClr val="431920"/>
+                  <a:srgbClr val="8E8780"/>
                 </a:solidFill>
               </a:rPr>
               <a:t>대표 사진 2</a:t>
@@ -4458,14 +4683,14 @@
         </p:nvSpPr>
         <p:spPr>
           <a:xfrm>
-            <a:off x="-182880" y="6144768"/>
-            <a:ext cx="12557455" cy="731520"/>
-          </a:xfrm>
-          <a:prstGeom prst="wave">
+            <a:off x="0" y="6565392"/>
+            <a:ext cx="12191695" cy="292608"/>
+          </a:xfrm>
+          <a:prstGeom prst="rect">
             <a:avLst/>
           </a:prstGeom>
           <a:solidFill>
-            <a:srgbClr val="F0D1D6"/>
+            <a:srgbClr val="EBADB8"/>
           </a:solidFill>
           <a:ln>
             <a:noFill/>
@@ -4487,14 +4712,14 @@
         </p:nvSpPr>
         <p:spPr>
           <a:xfrm>
-            <a:off x="-182880" y="6400800"/>
-            <a:ext cx="12557455" cy="502920"/>
-          </a:xfrm>
-          <a:prstGeom prst="wave">
+            <a:off x="640080" y="566928"/>
+            <a:ext cx="10911535" cy="10972"/>
+          </a:xfrm>
+          <a:prstGeom prst="rect">
             <a:avLst/>
           </a:prstGeom>
           <a:solidFill>
-            <a:srgbClr val="8D3443"/>
+            <a:srgbClr val="26231F"/>
           </a:solidFill>
           <a:ln>
             <a:noFill/>
@@ -4510,6 +4735,73 @@
       </p:sp>
       <p:sp>
         <p:nvSpPr>
+          <p:cNvPr id="5" name="상단 라벨"/>
+          <p:cNvSpPr txBox="1"/>
+          <p:nvPr/>
+        </p:nvSpPr>
+        <p:spPr>
+          <a:xfrm>
+            <a:off x="640080" y="237744"/>
+            <a:ext cx="5486400" cy="274320"/>
+          </a:xfrm>
+          <a:prstGeom prst="rect">
+            <a:avLst/>
+          </a:prstGeom>
+          <a:noFill/>
+        </p:spPr>
+        <p:txBody>
+          <a:bodyPr wrap="square" lIns="54864" rIns="54864" tIns="27432" bIns="27432" anchor="ctr">
+            <a:noAutofit/>
+          </a:bodyPr>
+          <a:lstStyle/>
+          <a:p>
+            <a:pPr algn="l">
+              <a:lnSpc>
+                <a:spcPct val="115000"/>
+              </a:lnSpc>
+            </a:pPr>
+            <a:r>
+              <a:rPr sz="900" b="1" i="0" spc="250">
+                <a:solidFill>
+                  <a:srgbClr val="26231F"/>
+                </a:solidFill>
+              </a:rPr>
+              <a:t>FIRST BIRTHDAY</a:t>
+            </a:r>
+          </a:p>
+        </p:txBody>
+      </p:sp>
+      <p:sp>
+        <p:nvSpPr>
+          <p:cNvPr id="6" name="포인트"/>
+          <p:cNvSpPr/>
+          <p:nvPr/>
+        </p:nvSpPr>
+        <p:spPr>
+          <a:xfrm>
+            <a:off x="11204143" y="246888"/>
+            <a:ext cx="237744" cy="237744"/>
+          </a:xfrm>
+          <a:prstGeom prst="star4">
+            <a:avLst/>
+          </a:prstGeom>
+          <a:solidFill>
+            <a:srgbClr val="E198A4"/>
+          </a:solidFill>
+          <a:ln>
+            <a:noFill/>
+          </a:ln>
+        </p:spPr>
+        <p:txBody>
+          <a:bodyPr rtlCol="0" anchor="ctr"/>
+          <a:lstStyle/>
+          <a:p>
+            <a:pPr algn="ctr"/>
+          </a:p>
+        </p:txBody>
+      </p:sp>
+      <p:sp>
+        <p:nvSpPr>
           <p:cNvPr id="2" name="Title 1"/>
           <p:cNvSpPr>
             <a:spLocks noGrp="1"/>
@@ -4520,8 +4812,8 @@
         </p:nvSpPr>
         <p:spPr>
           <a:xfrm>
-            <a:off x="640080" y="457200"/>
-            <a:ext cx="9722815" cy="868680"/>
+            <a:off x="640080" y="731520"/>
+            <a:ext cx="10911535" cy="822960"/>
           </a:xfrm>
         </p:spPr>
         <p:txBody>
@@ -4538,7 +4830,7 @@
             <a:r>
               <a:rPr sz="3000" b="1" i="0">
                 <a:solidFill>
-                  <a:srgbClr val="431920"/>
+                  <a:srgbClr val="26231F"/>
                 </a:solidFill>
               </a:rPr>
               <a:t>한 해의 순간들</a:t>
@@ -4548,13 +4840,13 @@
       </p:sp>
       <p:sp>
         <p:nvSpPr>
-          <p:cNvPr id="5" name="사진 자리"/>
+          <p:cNvPr id="7" name="사진 자리"/>
           <p:cNvSpPr/>
           <p:nvPr/>
         </p:nvSpPr>
         <p:spPr>
           <a:xfrm>
-            <a:off x="640080" y="1554480"/>
+            <a:off x="640080" y="1783080"/>
             <a:ext cx="3515258" cy="2103120"/>
           </a:xfrm>
           <a:prstGeom prst="roundRect">
@@ -4563,12 +4855,10 @@
             </a:avLst>
           </a:prstGeom>
           <a:solidFill>
-            <a:srgbClr val="F0D1D6"/>
+            <a:srgbClr val="F6D5DA"/>
           </a:solidFill>
           <a:ln w="19050">
-            <a:solidFill>
-              <a:srgbClr val="8D3443"/>
-            </a:solidFill>
+            <a:noFill/>
             <a:prstDash val="dash"/>
           </a:ln>
         </p:spPr>
@@ -4586,7 +4876,7 @@
             <a:r>
               <a:rPr sz="1200" b="0" i="0">
                 <a:solidFill>
-                  <a:srgbClr val="431920"/>
+                  <a:srgbClr val="8E8780"/>
                 </a:solidFill>
               </a:rPr>
               <a:t>사진 1</a:t>
@@ -4596,13 +4886,13 @@
       </p:sp>
       <p:sp>
         <p:nvSpPr>
-          <p:cNvPr id="6" name="사진 자리"/>
+          <p:cNvPr id="8" name="사진 자리"/>
           <p:cNvSpPr/>
           <p:nvPr/>
         </p:nvSpPr>
         <p:spPr>
           <a:xfrm>
-            <a:off x="4338218" y="1554480"/>
+            <a:off x="4338218" y="1783080"/>
             <a:ext cx="3515258" cy="2103120"/>
           </a:xfrm>
           <a:prstGeom prst="roundRect">
@@ -4611,12 +4901,10 @@
             </a:avLst>
           </a:prstGeom>
           <a:solidFill>
-            <a:srgbClr val="F0D1D6"/>
+            <a:srgbClr val="F6D5DA"/>
           </a:solidFill>
           <a:ln w="19050">
-            <a:solidFill>
-              <a:srgbClr val="8D3443"/>
-            </a:solidFill>
+            <a:noFill/>
             <a:prstDash val="dash"/>
           </a:ln>
         </p:spPr>
@@ -4634,7 +4922,7 @@
             <a:r>
               <a:rPr sz="1200" b="0" i="0">
                 <a:solidFill>
-                  <a:srgbClr val="431920"/>
+                  <a:srgbClr val="8E8780"/>
                 </a:solidFill>
               </a:rPr>
               <a:t>사진 2</a:t>
@@ -4644,13 +4932,13 @@
       </p:sp>
       <p:sp>
         <p:nvSpPr>
-          <p:cNvPr id="7" name="사진 자리"/>
+          <p:cNvPr id="9" name="사진 자리"/>
           <p:cNvSpPr/>
           <p:nvPr/>
         </p:nvSpPr>
         <p:spPr>
           <a:xfrm>
-            <a:off x="8036356" y="1554480"/>
+            <a:off x="8036356" y="1783080"/>
             <a:ext cx="3515258" cy="2103120"/>
           </a:xfrm>
           <a:prstGeom prst="roundRect">
@@ -4659,12 +4947,10 @@
             </a:avLst>
           </a:prstGeom>
           <a:solidFill>
-            <a:srgbClr val="F0D1D6"/>
+            <a:srgbClr val="F6D5DA"/>
           </a:solidFill>
           <a:ln w="19050">
-            <a:solidFill>
-              <a:srgbClr val="8D3443"/>
-            </a:solidFill>
+            <a:noFill/>
             <a:prstDash val="dash"/>
           </a:ln>
         </p:spPr>
@@ -4682,7 +4968,7 @@
             <a:r>
               <a:rPr sz="1200" b="0" i="0">
                 <a:solidFill>
-                  <a:srgbClr val="431920"/>
+                  <a:srgbClr val="8E8780"/>
                 </a:solidFill>
               </a:rPr>
               <a:t>사진 3</a:t>
@@ -4692,13 +4978,13 @@
       </p:sp>
       <p:sp>
         <p:nvSpPr>
-          <p:cNvPr id="8" name="사진 자리"/>
+          <p:cNvPr id="10" name="사진 자리"/>
           <p:cNvSpPr/>
           <p:nvPr/>
         </p:nvSpPr>
         <p:spPr>
           <a:xfrm>
-            <a:off x="640080" y="3840480"/>
+            <a:off x="640080" y="4069080"/>
             <a:ext cx="3515258" cy="2103120"/>
           </a:xfrm>
           <a:prstGeom prst="roundRect">
@@ -4707,12 +4993,10 @@
             </a:avLst>
           </a:prstGeom>
           <a:solidFill>
-            <a:srgbClr val="F0D1D6"/>
+            <a:srgbClr val="F6D5DA"/>
           </a:solidFill>
           <a:ln w="19050">
-            <a:solidFill>
-              <a:srgbClr val="8D3443"/>
-            </a:solidFill>
+            <a:noFill/>
             <a:prstDash val="dash"/>
           </a:ln>
         </p:spPr>
@@ -4730,7 +5014,7 @@
             <a:r>
               <a:rPr sz="1200" b="0" i="0">
                 <a:solidFill>
-                  <a:srgbClr val="431920"/>
+                  <a:srgbClr val="8E8780"/>
                 </a:solidFill>
               </a:rPr>
               <a:t>사진 4</a:t>
@@ -4740,13 +5024,13 @@
       </p:sp>
       <p:sp>
         <p:nvSpPr>
-          <p:cNvPr id="9" name="사진 자리"/>
+          <p:cNvPr id="11" name="사진 자리"/>
           <p:cNvSpPr/>
           <p:nvPr/>
         </p:nvSpPr>
         <p:spPr>
           <a:xfrm>
-            <a:off x="4338218" y="3840480"/>
+            <a:off x="4338218" y="4069080"/>
             <a:ext cx="3515258" cy="2103120"/>
           </a:xfrm>
           <a:prstGeom prst="roundRect">
@@ -4755,12 +5039,10 @@
             </a:avLst>
           </a:prstGeom>
           <a:solidFill>
-            <a:srgbClr val="F0D1D6"/>
+            <a:srgbClr val="F6D5DA"/>
           </a:solidFill>
           <a:ln w="19050">
-            <a:solidFill>
-              <a:srgbClr val="8D3443"/>
-            </a:solidFill>
+            <a:noFill/>
             <a:prstDash val="dash"/>
           </a:ln>
         </p:spPr>
@@ -4778,7 +5060,7 @@
             <a:r>
               <a:rPr sz="1200" b="0" i="0">
                 <a:solidFill>
-                  <a:srgbClr val="431920"/>
+                  <a:srgbClr val="8E8780"/>
                 </a:solidFill>
               </a:rPr>
               <a:t>사진 5</a:t>
@@ -4788,13 +5070,13 @@
       </p:sp>
       <p:sp>
         <p:nvSpPr>
-          <p:cNvPr id="10" name="사진 자리"/>
+          <p:cNvPr id="12" name="사진 자리"/>
           <p:cNvSpPr/>
           <p:nvPr/>
         </p:nvSpPr>
         <p:spPr>
           <a:xfrm>
-            <a:off x="8036356" y="3840480"/>
+            <a:off x="8036356" y="4069080"/>
             <a:ext cx="3515258" cy="2103120"/>
           </a:xfrm>
           <a:prstGeom prst="roundRect">
@@ -4803,12 +5085,10 @@
             </a:avLst>
           </a:prstGeom>
           <a:solidFill>
-            <a:srgbClr val="F0D1D6"/>
+            <a:srgbClr val="F6D5DA"/>
           </a:solidFill>
           <a:ln w="19050">
-            <a:solidFill>
-              <a:srgbClr val="8D3443"/>
-            </a:solidFill>
+            <a:noFill/>
             <a:prstDash val="dash"/>
           </a:ln>
         </p:spPr>
@@ -4826,7 +5106,7 @@
             <a:r>
               <a:rPr sz="1200" b="0" i="0">
                 <a:solidFill>
-                  <a:srgbClr val="431920"/>
+                  <a:srgbClr val="8E8780"/>
                 </a:solidFill>
               </a:rPr>
               <a:t>사진 6</a:t>
@@ -4868,14 +5148,14 @@
         </p:nvSpPr>
         <p:spPr>
           <a:xfrm>
-            <a:off x="-182880" y="6144768"/>
-            <a:ext cx="12557455" cy="731520"/>
-          </a:xfrm>
-          <a:prstGeom prst="wave">
+            <a:off x="0" y="6565392"/>
+            <a:ext cx="12191695" cy="292608"/>
+          </a:xfrm>
+          <a:prstGeom prst="rect">
             <a:avLst/>
           </a:prstGeom>
           <a:solidFill>
-            <a:srgbClr val="F0D1D6"/>
+            <a:srgbClr val="EBADB8"/>
           </a:solidFill>
           <a:ln>
             <a:noFill/>
@@ -4897,14 +5177,14 @@
         </p:nvSpPr>
         <p:spPr>
           <a:xfrm>
-            <a:off x="-182880" y="6400800"/>
-            <a:ext cx="12557455" cy="502920"/>
-          </a:xfrm>
-          <a:prstGeom prst="wave">
+            <a:off x="640080" y="566928"/>
+            <a:ext cx="10911535" cy="10972"/>
+          </a:xfrm>
+          <a:prstGeom prst="rect">
             <a:avLst/>
           </a:prstGeom>
           <a:solidFill>
-            <a:srgbClr val="8D3443"/>
+            <a:srgbClr val="26231F"/>
           </a:solidFill>
           <a:ln>
             <a:noFill/>
@@ -4920,6 +5200,73 @@
       </p:sp>
       <p:sp>
         <p:nvSpPr>
+          <p:cNvPr id="5" name="상단 라벨"/>
+          <p:cNvSpPr txBox="1"/>
+          <p:nvPr/>
+        </p:nvSpPr>
+        <p:spPr>
+          <a:xfrm>
+            <a:off x="640080" y="237744"/>
+            <a:ext cx="5486400" cy="274320"/>
+          </a:xfrm>
+          <a:prstGeom prst="rect">
+            <a:avLst/>
+          </a:prstGeom>
+          <a:noFill/>
+        </p:spPr>
+        <p:txBody>
+          <a:bodyPr wrap="square" lIns="54864" rIns="54864" tIns="27432" bIns="27432" anchor="ctr">
+            <a:noAutofit/>
+          </a:bodyPr>
+          <a:lstStyle/>
+          <a:p>
+            <a:pPr algn="l">
+              <a:lnSpc>
+                <a:spcPct val="115000"/>
+              </a:lnSpc>
+            </a:pPr>
+            <a:r>
+              <a:rPr sz="900" b="1" i="0" spc="250">
+                <a:solidFill>
+                  <a:srgbClr val="26231F"/>
+                </a:solidFill>
+              </a:rPr>
+              <a:t>FIRST BIRTHDAY</a:t>
+            </a:r>
+          </a:p>
+        </p:txBody>
+      </p:sp>
+      <p:sp>
+        <p:nvSpPr>
+          <p:cNvPr id="6" name="포인트"/>
+          <p:cNvSpPr/>
+          <p:nvPr/>
+        </p:nvSpPr>
+        <p:spPr>
+          <a:xfrm>
+            <a:off x="11204143" y="246888"/>
+            <a:ext cx="237744" cy="237744"/>
+          </a:xfrm>
+          <a:prstGeom prst="star4">
+            <a:avLst/>
+          </a:prstGeom>
+          <a:solidFill>
+            <a:srgbClr val="E198A4"/>
+          </a:solidFill>
+          <a:ln>
+            <a:noFill/>
+          </a:ln>
+        </p:spPr>
+        <p:txBody>
+          <a:bodyPr rtlCol="0" anchor="ctr"/>
+          <a:lstStyle/>
+          <a:p>
+            <a:pPr algn="ctr"/>
+          </a:p>
+        </p:txBody>
+      </p:sp>
+      <p:sp>
+        <p:nvSpPr>
           <p:cNvPr id="2" name="Title 1"/>
           <p:cNvSpPr>
             <a:spLocks noGrp="1"/>
@@ -4930,8 +5277,8 @@
         </p:nvSpPr>
         <p:spPr>
           <a:xfrm>
-            <a:off x="640080" y="457200"/>
-            <a:ext cx="9722815" cy="868680"/>
+            <a:off x="640080" y="731520"/>
+            <a:ext cx="10911535" cy="822960"/>
           </a:xfrm>
         </p:spPr>
         <p:txBody>
@@ -4948,7 +5295,7 @@
             <a:r>
               <a:rPr sz="3000" b="1" i="0">
                 <a:solidFill>
-                  <a:srgbClr val="431920"/>
+                  <a:srgbClr val="26231F"/>
                 </a:solidFill>
               </a:rPr>
               <a:t>사진 모음</a:t>
@@ -4958,13 +5305,13 @@
       </p:sp>
       <p:sp>
         <p:nvSpPr>
-          <p:cNvPr id="5" name="사진 자리"/>
+          <p:cNvPr id="7" name="사진 자리"/>
           <p:cNvSpPr/>
           <p:nvPr/>
         </p:nvSpPr>
         <p:spPr>
           <a:xfrm>
-            <a:off x="640080" y="1554480"/>
+            <a:off x="640080" y="1783080"/>
             <a:ext cx="2590723" cy="2103120"/>
           </a:xfrm>
           <a:prstGeom prst="roundRect">
@@ -4973,12 +5320,10 @@
             </a:avLst>
           </a:prstGeom>
           <a:solidFill>
-            <a:srgbClr val="F0D1D6"/>
+            <a:srgbClr val="F6D5DA"/>
           </a:solidFill>
           <a:ln w="19050">
-            <a:solidFill>
-              <a:srgbClr val="8D3443"/>
-            </a:solidFill>
+            <a:noFill/>
             <a:prstDash val="dash"/>
           </a:ln>
         </p:spPr>
@@ -4996,7 +5341,7 @@
             <a:r>
               <a:rPr sz="1200" b="0" i="0">
                 <a:solidFill>
-                  <a:srgbClr val="431920"/>
+                  <a:srgbClr val="8E8780"/>
                 </a:solidFill>
               </a:rPr>
               <a:t>사진 1</a:t>
@@ -5006,13 +5351,13 @@
       </p:sp>
       <p:sp>
         <p:nvSpPr>
-          <p:cNvPr id="6" name="사진 자리"/>
+          <p:cNvPr id="8" name="사진 자리"/>
           <p:cNvSpPr/>
           <p:nvPr/>
         </p:nvSpPr>
         <p:spPr>
           <a:xfrm>
-            <a:off x="3413683" y="1554480"/>
+            <a:off x="3413683" y="1783080"/>
             <a:ext cx="2590723" cy="2103120"/>
           </a:xfrm>
           <a:prstGeom prst="roundRect">
@@ -5021,12 +5366,10 @@
             </a:avLst>
           </a:prstGeom>
           <a:solidFill>
-            <a:srgbClr val="F0D1D6"/>
+            <a:srgbClr val="F6D5DA"/>
           </a:solidFill>
           <a:ln w="19050">
-            <a:solidFill>
-              <a:srgbClr val="8D3443"/>
-            </a:solidFill>
+            <a:noFill/>
             <a:prstDash val="dash"/>
           </a:ln>
         </p:spPr>
@@ -5044,7 +5387,7 @@
             <a:r>
               <a:rPr sz="1200" b="0" i="0">
                 <a:solidFill>
-                  <a:srgbClr val="431920"/>
+                  <a:srgbClr val="8E8780"/>
                 </a:solidFill>
               </a:rPr>
               <a:t>사진 2</a:t>
@@ -5054,13 +5397,13 @@
       </p:sp>
       <p:sp>
         <p:nvSpPr>
-          <p:cNvPr id="7" name="사진 자리"/>
+          <p:cNvPr id="9" name="사진 자리"/>
           <p:cNvSpPr/>
           <p:nvPr/>
         </p:nvSpPr>
         <p:spPr>
           <a:xfrm>
-            <a:off x="6187287" y="1554480"/>
+            <a:off x="6187287" y="1783080"/>
             <a:ext cx="2590723" cy="2103120"/>
           </a:xfrm>
           <a:prstGeom prst="roundRect">
@@ -5069,12 +5412,10 @@
             </a:avLst>
           </a:prstGeom>
           <a:solidFill>
-            <a:srgbClr val="F0D1D6"/>
+            <a:srgbClr val="F6D5DA"/>
           </a:solidFill>
           <a:ln w="19050">
-            <a:solidFill>
-              <a:srgbClr val="8D3443"/>
-            </a:solidFill>
+            <a:noFill/>
             <a:prstDash val="dash"/>
           </a:ln>
         </p:spPr>
@@ -5092,7 +5433,7 @@
             <a:r>
               <a:rPr sz="1200" b="0" i="0">
                 <a:solidFill>
-                  <a:srgbClr val="431920"/>
+                  <a:srgbClr val="8E8780"/>
                 </a:solidFill>
               </a:rPr>
               <a:t>사진 3</a:t>
@@ -5102,13 +5443,13 @@
       </p:sp>
       <p:sp>
         <p:nvSpPr>
-          <p:cNvPr id="8" name="사진 자리"/>
+          <p:cNvPr id="10" name="사진 자리"/>
           <p:cNvSpPr/>
           <p:nvPr/>
         </p:nvSpPr>
         <p:spPr>
           <a:xfrm>
-            <a:off x="8960891" y="1554480"/>
+            <a:off x="8960891" y="1783080"/>
             <a:ext cx="2590723" cy="2103120"/>
           </a:xfrm>
           <a:prstGeom prst="roundRect">
@@ -5117,12 +5458,10 @@
             </a:avLst>
           </a:prstGeom>
           <a:solidFill>
-            <a:srgbClr val="F0D1D6"/>
+            <a:srgbClr val="F6D5DA"/>
           </a:solidFill>
           <a:ln w="19050">
-            <a:solidFill>
-              <a:srgbClr val="8D3443"/>
-            </a:solidFill>
+            <a:noFill/>
             <a:prstDash val="dash"/>
           </a:ln>
         </p:spPr>
@@ -5140,7 +5479,7 @@
             <a:r>
               <a:rPr sz="1200" b="0" i="0">
                 <a:solidFill>
-                  <a:srgbClr val="431920"/>
+                  <a:srgbClr val="8E8780"/>
                 </a:solidFill>
               </a:rPr>
               <a:t>사진 4</a:t>
@@ -5150,13 +5489,13 @@
       </p:sp>
       <p:sp>
         <p:nvSpPr>
-          <p:cNvPr id="9" name="사진 자리"/>
+          <p:cNvPr id="11" name="사진 자리"/>
           <p:cNvSpPr/>
           <p:nvPr/>
         </p:nvSpPr>
         <p:spPr>
           <a:xfrm>
-            <a:off x="640080" y="3840480"/>
+            <a:off x="640080" y="4069080"/>
             <a:ext cx="2590723" cy="2103120"/>
           </a:xfrm>
           <a:prstGeom prst="roundRect">
@@ -5165,12 +5504,10 @@
             </a:avLst>
           </a:prstGeom>
           <a:solidFill>
-            <a:srgbClr val="F0D1D6"/>
+            <a:srgbClr val="F6D5DA"/>
           </a:solidFill>
           <a:ln w="19050">
-            <a:solidFill>
-              <a:srgbClr val="8D3443"/>
-            </a:solidFill>
+            <a:noFill/>
             <a:prstDash val="dash"/>
           </a:ln>
         </p:spPr>
@@ -5188,7 +5525,7 @@
             <a:r>
               <a:rPr sz="1200" b="0" i="0">
                 <a:solidFill>
-                  <a:srgbClr val="431920"/>
+                  <a:srgbClr val="8E8780"/>
                 </a:solidFill>
               </a:rPr>
               <a:t>사진 5</a:t>
@@ -5198,13 +5535,13 @@
       </p:sp>
       <p:sp>
         <p:nvSpPr>
-          <p:cNvPr id="10" name="사진 자리"/>
+          <p:cNvPr id="12" name="사진 자리"/>
           <p:cNvSpPr/>
           <p:nvPr/>
         </p:nvSpPr>
         <p:spPr>
           <a:xfrm>
-            <a:off x="3413683" y="3840480"/>
+            <a:off x="3413683" y="4069080"/>
             <a:ext cx="2590723" cy="2103120"/>
           </a:xfrm>
           <a:prstGeom prst="roundRect">
@@ -5213,12 +5550,10 @@
             </a:avLst>
           </a:prstGeom>
           <a:solidFill>
-            <a:srgbClr val="F0D1D6"/>
+            <a:srgbClr val="F6D5DA"/>
           </a:solidFill>
           <a:ln w="19050">
-            <a:solidFill>
-              <a:srgbClr val="8D3443"/>
-            </a:solidFill>
+            <a:noFill/>
             <a:prstDash val="dash"/>
           </a:ln>
         </p:spPr>
@@ -5236,7 +5571,7 @@
             <a:r>
               <a:rPr sz="1200" b="0" i="0">
                 <a:solidFill>
-                  <a:srgbClr val="431920"/>
+                  <a:srgbClr val="8E8780"/>
                 </a:solidFill>
               </a:rPr>
               <a:t>사진 6</a:t>
@@ -5246,13 +5581,13 @@
       </p:sp>
       <p:sp>
         <p:nvSpPr>
-          <p:cNvPr id="11" name="사진 자리"/>
+          <p:cNvPr id="13" name="사진 자리"/>
           <p:cNvSpPr/>
           <p:nvPr/>
         </p:nvSpPr>
         <p:spPr>
           <a:xfrm>
-            <a:off x="6187287" y="3840480"/>
+            <a:off x="6187287" y="4069080"/>
             <a:ext cx="2590723" cy="2103120"/>
           </a:xfrm>
           <a:prstGeom prst="roundRect">
@@ -5261,12 +5596,10 @@
             </a:avLst>
           </a:prstGeom>
           <a:solidFill>
-            <a:srgbClr val="F0D1D6"/>
+            <a:srgbClr val="F6D5DA"/>
           </a:solidFill>
           <a:ln w="19050">
-            <a:solidFill>
-              <a:srgbClr val="8D3443"/>
-            </a:solidFill>
+            <a:noFill/>
             <a:prstDash val="dash"/>
           </a:ln>
         </p:spPr>
@@ -5284,7 +5617,7 @@
             <a:r>
               <a:rPr sz="1200" b="0" i="0">
                 <a:solidFill>
-                  <a:srgbClr val="431920"/>
+                  <a:srgbClr val="8E8780"/>
                 </a:solidFill>
               </a:rPr>
               <a:t>사진 7</a:t>
@@ -5294,13 +5627,13 @@
       </p:sp>
       <p:sp>
         <p:nvSpPr>
-          <p:cNvPr id="12" name="사진 자리"/>
+          <p:cNvPr id="14" name="사진 자리"/>
           <p:cNvSpPr/>
           <p:nvPr/>
         </p:nvSpPr>
         <p:spPr>
           <a:xfrm>
-            <a:off x="8960891" y="3840480"/>
+            <a:off x="8960891" y="4069080"/>
             <a:ext cx="2590723" cy="2103120"/>
           </a:xfrm>
           <a:prstGeom prst="roundRect">
@@ -5309,12 +5642,10 @@
             </a:avLst>
           </a:prstGeom>
           <a:solidFill>
-            <a:srgbClr val="F0D1D6"/>
+            <a:srgbClr val="F6D5DA"/>
           </a:solidFill>
           <a:ln w="19050">
-            <a:solidFill>
-              <a:srgbClr val="8D3443"/>
-            </a:solidFill>
+            <a:noFill/>
             <a:prstDash val="dash"/>
           </a:ln>
         </p:spPr>
@@ -5332,7 +5663,7 @@
             <a:r>
               <a:rPr sz="1200" b="0" i="0">
                 <a:solidFill>
-                  <a:srgbClr val="431920"/>
+                  <a:srgbClr val="8E8780"/>
                 </a:solidFill>
               </a:rPr>
               <a:t>사진 8</a:t>
@@ -5351,6 +5682,14 @@
 <file path=ppt/slides/slide6.xml><?xml version="1.0" encoding="utf-8"?>
 <p:sld xmlns:a="http://schemas.openxmlformats.org/drawingml/2006/main" xmlns:p="http://schemas.openxmlformats.org/presentationml/2006/main" xmlns:r="http://schemas.openxmlformats.org/officeDocument/2006/relationships">
   <p:cSld>
+    <p:bg>
+      <p:bgPr>
+        <a:solidFill>
+          <a:srgbClr val="F6D5DA"/>
+        </a:solidFill>
+        <a:effectLst/>
+      </p:bgPr>
+    </p:bg>
     <p:spTree>
       <p:nvGrpSpPr>
         <p:cNvPr id="1" name=""/>
@@ -5358,30 +5697,119 @@
         <p:nvPr/>
       </p:nvGrpSpPr>
       <p:grpSpPr/>
-      <p:pic>
-        <p:nvPicPr>
-          <p:cNvPr id="3" name="표지 그림" descr="birthday-43.jpg"/>
-          <p:cNvPicPr>
-            <a:picLocks noChangeAspect="1"/>
-          </p:cNvPicPr>
+      <p:sp>
+        <p:nvSpPr>
+          <p:cNvPr id="3" name="사진 자리"/>
+          <p:cNvSpPr/>
           <p:nvPr/>
-        </p:nvPicPr>
-        <p:blipFill>
-          <a:blip r:embed="rId2"/>
-          <a:stretch>
-            <a:fillRect/>
-          </a:stretch>
-        </p:blipFill>
-        <p:spPr>
-          <a:xfrm>
-            <a:off x="0" y="0"/>
-            <a:ext cx="12191695" cy="6858000"/>
+        </p:nvSpPr>
+        <p:spPr>
+          <a:xfrm>
+            <a:off x="7558851" y="685800"/>
+            <a:ext cx="3169840" cy="5486400"/>
+          </a:xfrm>
+          <a:prstGeom prst="round2SameRect">
+            <a:avLst>
+              <a:gd name="adj1" fmla="val 50000"/>
+              <a:gd name="adj2" fmla="val 0"/>
+            </a:avLst>
+          </a:prstGeom>
+          <a:solidFill>
+            <a:srgbClr val="EBADB8"/>
+          </a:solidFill>
+          <a:ln>
+            <a:noFill/>
+          </a:ln>
+        </p:spPr>
+        <p:txBody>
+          <a:bodyPr rtlCol="0" anchor="ctr" wrap="square" lIns="54864" rIns="54864" tIns="27432" bIns="27432">
+            <a:noAutofit/>
+          </a:bodyPr>
+          <a:lstStyle/>
+          <a:p>
+            <a:pPr algn="ctr">
+              <a:lnSpc>
+                <a:spcPct val="100000"/>
+              </a:lnSpc>
+            </a:pPr>
+            <a:r>
+              <a:rPr sz="1400" b="0" i="0">
+                <a:solidFill>
+                  <a:srgbClr val="49272D"/>
+                </a:solidFill>
+              </a:rPr>
+              <a:t>사진을 넣어 주세요</a:t>
+            </a:r>
+          </a:p>
+        </p:txBody>
+      </p:sp>
+      <p:sp>
+        <p:nvSpPr>
+          <p:cNvPr id="4" name="장식"/>
+          <p:cNvSpPr/>
+          <p:nvPr/>
+        </p:nvSpPr>
+        <p:spPr>
+          <a:xfrm>
+            <a:off x="6827349" y="4251960"/>
+            <a:ext cx="1005840" cy="1005840"/>
+          </a:xfrm>
+          <a:prstGeom prst="ellipse">
+            <a:avLst/>
+          </a:prstGeom>
+          <a:solidFill>
+            <a:srgbClr val="EBADB8"/>
+          </a:solidFill>
+          <a:ln>
+            <a:noFill/>
+          </a:ln>
+        </p:spPr>
+        <p:txBody>
+          <a:bodyPr rtlCol="0" anchor="ctr"/>
+          <a:lstStyle/>
+          <a:p>
+            <a:pPr algn="ctr"/>
+          </a:p>
+        </p:txBody>
+      </p:sp>
+      <p:sp>
+        <p:nvSpPr>
+          <p:cNvPr id="5" name="라벨"/>
+          <p:cNvSpPr txBox="1"/>
+          <p:nvPr/>
+        </p:nvSpPr>
+        <p:spPr>
+          <a:xfrm>
+            <a:off x="822960" y="2148840"/>
+            <a:ext cx="5608179" cy="274320"/>
           </a:xfrm>
           <a:prstGeom prst="rect">
             <a:avLst/>
           </a:prstGeom>
-        </p:spPr>
-      </p:pic>
+          <a:noFill/>
+        </p:spPr>
+        <p:txBody>
+          <a:bodyPr wrap="square" lIns="54864" rIns="54864" tIns="27432" bIns="27432" anchor="t">
+            <a:noAutofit/>
+          </a:bodyPr>
+          <a:lstStyle/>
+          <a:p>
+            <a:pPr algn="l">
+              <a:lnSpc>
+                <a:spcPct val="115000"/>
+              </a:lnSpc>
+            </a:pPr>
+            <a:r>
+              <a:rPr sz="1000" b="1" i="0" spc="250">
+                <a:solidFill>
+                  <a:srgbClr val="26231F"/>
+                </a:solidFill>
+              </a:rPr>
+              <a:t>FIRST BIRTHDAY</a:t>
+            </a:r>
+          </a:p>
+        </p:txBody>
+      </p:sp>
       <p:sp>
         <p:nvSpPr>
           <p:cNvPr id="2" name="Title 1"/>
@@ -5394,8 +5822,8 @@
         </p:nvSpPr>
         <p:spPr>
           <a:xfrm>
-            <a:off x="853418" y="2057400"/>
-            <a:ext cx="6095847" cy="1554480"/>
+            <a:off x="822960" y="2606040"/>
+            <a:ext cx="5608179" cy="1188720"/>
           </a:xfrm>
         </p:spPr>
         <p:txBody>
@@ -5412,7 +5840,7 @@
             <a:r>
               <a:rPr sz="3400" b="1" i="0">
                 <a:solidFill>
-                  <a:srgbClr val="431920"/>
+                  <a:srgbClr val="26231F"/>
                 </a:solidFill>
               </a:rPr>
               <a:t>와 주셔서 고맙습니다</a:t>
@@ -5422,14 +5850,14 @@
       </p:sp>
       <p:sp>
         <p:nvSpPr>
-          <p:cNvPr id="4" name="한 줄 문구"/>
+          <p:cNvPr id="6" name="한 줄 문구"/>
           <p:cNvSpPr txBox="1"/>
           <p:nvPr/>
         </p:nvSpPr>
         <p:spPr>
           <a:xfrm>
-            <a:off x="853418" y="3749039"/>
-            <a:ext cx="6095847" cy="822960"/>
+            <a:off x="822960" y="3886200"/>
+            <a:ext cx="5608179" cy="822960"/>
           </a:xfrm>
           <a:prstGeom prst="rect">
             <a:avLst/>
@@ -5448,9 +5876,9 @@
               </a:lnSpc>
             </a:pPr>
             <a:r>
-              <a:rPr sz="1700" b="0" i="1">
+              <a:rPr sz="1700" b="0" i="0">
                 <a:solidFill>
-                  <a:srgbClr val="431920"/>
+                  <a:srgbClr val="26231F"/>
                 </a:solidFill>
               </a:rPr>
               <a:t>아이가 한 살이 되었습니다</a:t>
@@ -5460,14 +5888,14 @@
       </p:sp>
       <p:sp>
         <p:nvSpPr>
-          <p:cNvPr id="5" name="안내 문구"/>
+          <p:cNvPr id="7" name="안내 문구"/>
           <p:cNvSpPr txBox="1"/>
           <p:nvPr/>
         </p:nvSpPr>
         <p:spPr>
           <a:xfrm>
-            <a:off x="853418" y="4617720"/>
-            <a:ext cx="6095847" cy="914400"/>
+            <a:off x="822960" y="4754880"/>
+            <a:ext cx="5608179" cy="914400"/>
           </a:xfrm>
           <a:prstGeom prst="rect">
             <a:avLst/>
@@ -5488,7 +5916,7 @@
             <a:r>
               <a:rPr sz="1400" b="0" i="0">
                 <a:solidFill>
-                  <a:srgbClr val="666666"/>
+                  <a:srgbClr val="26231F"/>
                 </a:solidFill>
               </a:rPr>
               <a:t>아기 이름 · 부모 이름</a:t>
@@ -5515,34 +5943,34 @@
         <a:sysClr val="window" lastClr="FFFFFF"/>
       </a:lt1>
       <a:dk2>
-        <a:srgbClr val="431920"/>
+        <a:srgbClr val="49272D"/>
       </a:dk2>
       <a:lt2>
-        <a:srgbClr val="F9F0F2"/>
+        <a:srgbClr val="FBECEF"/>
       </a:lt2>
       <a:accent1>
-        <a:srgbClr val="8D3443"/>
+        <a:srgbClr val="E198A4"/>
       </a:accent1>
       <a:accent2>
-        <a:srgbClr val="3B9158"/>
+        <a:srgbClr val="EAC7B8"/>
       </a:accent2>
       <a:accent3>
-        <a:srgbClr val="431920"/>
+        <a:srgbClr val="49272D"/>
       </a:accent3>
       <a:accent4>
-        <a:srgbClr val="F0D1D6"/>
+        <a:srgbClr val="F6D5DA"/>
       </a:accent4>
       <a:accent5>
-        <a:srgbClr val="64624E"/>
+        <a:srgbClr val="E6B0AE"/>
       </a:accent5>
       <a:accent6>
-        <a:srgbClr val="8E7579"/>
+        <a:srgbClr val="927D81"/>
       </a:accent6>
       <a:hlink>
-        <a:srgbClr val="8D3443"/>
+        <a:srgbClr val="E198A4"/>
       </a:hlink>
       <a:folHlink>
-        <a:srgbClr val="431920"/>
+        <a:srgbClr val="49272D"/>
       </a:folHlink>
     </a:clrScheme>
     <a:fontScheme name="Office">
